--- a/lecons/F3/40_FORM4_LESSON36_Pressure_Belts_Planetary_Winds.pptx
+++ b/lecons/F3/40_FORM4_LESSON36_Pressure_Belts_Planetary_Winds.pptx
@@ -50,9 +50,13 @@
     <p:sldId id="298" r:id="rId44"/>
     <p:sldId id="299" r:id="rId45"/>
     <p:sldId id="300" r:id="rId46"/>
+    <p:sldId id="301" r:id="rId47"/>
+    <p:sldId id="302" r:id="rId48"/>
+    <p:sldId id="303" r:id="rId49"/>
+    <p:sldId id="304" r:id="rId50"/>
   </p:sldIdLst>
   <p:notesMasterIdLst>
-    <p:notesMasterId r:id="rId47"/>
+    <p:notesMasterId r:id="rId51"/>
   </p:notesMasterIdLst>
   <p:sldSz cx="12192000" cy="6858000"/>
   <p:notesSz cx="6858000" cy="12192000"/>
@@ -634,7 +638,7 @@
           <a:p>
             <a:r>
               <a:rPr lang="en-US" dirty="0"/>
-              <a:t>Listen carefully to this situation from real life. From June to September, the wind in Garoua comes from the south-west and brings rain. From December to February, the dry Harmattan comes from the north-east. Think about it, because I am going to ask you some questions.</a:t>
+              <a:t>Listen carefully to this situation from real life. From June to September, the wind in Garoua comes from the south-west and brings rain. From December to February, the dry, dusty Harmattan comes from the north-east. Hamidou asks: "Why do the winds change direction, and where do they come from?" Think about it, because I am going to ask you some questions.</a:t>
             </a:r>
             <a:endParaRPr lang="en-US" dirty="0"/>
           </a:p>
@@ -810,7 +814,7 @@
           <a:p>
             <a:r>
               <a:rPr lang="en-US" dirty="0"/>
-              <a:t>Good. We want to know why the wind changes with the seasons.</a:t>
+              <a:t>Good. Hamidou does not know why the winds of Garoua change direction during the year.</a:t>
             </a:r>
             <a:endParaRPr lang="en-US" dirty="0"/>
           </a:p>
@@ -898,7 +902,7 @@
           <a:p>
             <a:r>
               <a:rPr lang="en-US" dirty="0"/>
-              <a:t>Question 2: Which wind brings rain? Think for a moment, then raise your hand to answer.</a:t>
+              <a:t>Question 2: From where does the rainy wind come? Think for a moment, then raise your hand to answer.</a:t>
             </a:r>
             <a:endParaRPr lang="en-US" dirty="0"/>
           </a:p>
@@ -986,7 +990,7 @@
           <a:p>
             <a:r>
               <a:rPr lang="en-US" dirty="0"/>
-              <a:t>Good. The south-west wind.</a:t>
+              <a:t>Good. From the south-west.</a:t>
             </a:r>
             <a:endParaRPr lang="en-US" dirty="0"/>
           </a:p>
@@ -1074,7 +1078,7 @@
           <a:p>
             <a:r>
               <a:rPr lang="en-US" dirty="0"/>
-              <a:t>Question 3: Which wind is dry? Think for a moment, then raise your hand to answer.</a:t>
+              <a:t>Question 3: From where does the Harmattan come? Think for a moment, then raise your hand to answer.</a:t>
             </a:r>
             <a:endParaRPr lang="en-US" dirty="0"/>
           </a:p>
@@ -1162,7 +1166,7 @@
           <a:p>
             <a:r>
               <a:rPr lang="en-US" dirty="0"/>
-              <a:t>Good. The Harmattan, from the north-east.</a:t>
+              <a:t>Good. From the north-east (the Sahara).</a:t>
             </a:r>
             <a:endParaRPr lang="en-US" dirty="0"/>
           </a:p>
@@ -1426,7 +1430,7 @@
           <a:p>
             <a:r>
               <a:rPr lang="en-US" dirty="0"/>
-              <a:t>Activity 1. Look carefully at this diagram: pressure belts of the Northern Hemisphere. Observe every detail before I ask the question.</a:t>
+              <a:t>Activity 1. Look carefully at this diagram: pressure belts of the Earth. Observe every detail before I ask the question.</a:t>
             </a:r>
             <a:endParaRPr lang="en-US" dirty="0"/>
           </a:p>
@@ -1602,7 +1606,7 @@
           <a:p>
             <a:r>
               <a:rPr lang="en-US" dirty="0"/>
-              <a:t>Here is the question for Activity 1: Is the pressure high or low at the Equator? Why? Take one minute to think and write your answer in your rough notebook.</a:t>
+              <a:t>Here is the question for Activity 1: Is the pressure high or low at the Equator? Take one minute to think and write your answer in your rough notebook.</a:t>
             </a:r>
             <a:endParaRPr lang="en-US" dirty="0"/>
           </a:p>
@@ -1690,7 +1694,7 @@
           <a:p>
             <a:r>
               <a:rPr lang="en-US" dirty="0"/>
-              <a:t>Let us check the answer together. Low. Hot air rises there.</a:t>
+              <a:t>Let us check the answer together. Low.</a:t>
             </a:r>
             <a:endParaRPr lang="en-US" dirty="0"/>
           </a:p>
@@ -1778,7 +1782,7 @@
           <a:p>
             <a:r>
               <a:rPr lang="en-US" dirty="0"/>
-              <a:t>Activity 2. Look carefully at this picture: the sky during the Harmattan. Observe every detail before I ask the question.</a:t>
+              <a:t>Here is the next question: Why? Take one minute to think and write your answer in your rough notebook.</a:t>
             </a:r>
             <a:endParaRPr lang="en-US" dirty="0"/>
           </a:p>
@@ -1866,7 +1870,7 @@
           <a:p>
             <a:r>
               <a:rPr lang="en-US" dirty="0"/>
-              <a:t>Here is the question for Activity 2: The Harmattan blows from the Sahara towards the Equator. Which planetary wind is it? Take one minute to think and write your answer in your rough notebook.</a:t>
+              <a:t>Let us check the answer together. Hot air rises there.</a:t>
             </a:r>
             <a:endParaRPr lang="en-US" dirty="0"/>
           </a:p>
@@ -1954,7 +1958,7 @@
           <a:p>
             <a:r>
               <a:rPr lang="en-US" dirty="0"/>
-              <a:t>Let us check the answer together. The north-east Trade Wind.</a:t>
+              <a:t>Activity 2. Look carefully at this picture: dusty Harmattan air. Observe every detail before I ask the question.</a:t>
             </a:r>
             <a:endParaRPr lang="en-US" dirty="0"/>
           </a:p>
@@ -2042,7 +2046,7 @@
           <a:p>
             <a:r>
               <a:rPr lang="en-US" dirty="0"/>
-              <a:t>Activity 3. Look carefully at this animation: animation: the rain belt moves north in July and south in January. Watch the animation to the end; it will play again.</a:t>
+              <a:t>Here is the question for Activity 2: The Harmattan blows from the Sahara towards the Equator. Which planetary wind is it? Take one minute to think and write your answer in your rough notebook.</a:t>
             </a:r>
             <a:endParaRPr lang="en-US" dirty="0"/>
           </a:p>
@@ -2130,7 +2134,7 @@
           <a:p>
             <a:r>
               <a:rPr lang="en-US" dirty="0"/>
-              <a:t>Here is the question for Activity 3: Why does Garoua have rain in July and not in January? Take one minute to think and write your answer in your rough notebook.</a:t>
+              <a:t>Let us check the answer together. The north-east Trade Wind.</a:t>
             </a:r>
             <a:endParaRPr lang="en-US" dirty="0"/>
           </a:p>
@@ -2218,7 +2222,7 @@
           <a:p>
             <a:r>
               <a:rPr lang="en-US" dirty="0"/>
-              <a:t>Let us check the answer together. In July, the rain belt and the wet south-west wind reach Garoua.</a:t>
+              <a:t>Activity 3. Look carefully at this animation: animation: the rain belt moves north in July. Watch the animation to the end; it will play again.</a:t>
             </a:r>
             <a:endParaRPr lang="en-US" dirty="0"/>
           </a:p>
@@ -2306,7 +2310,7 @@
           <a:p>
             <a:r>
               <a:rPr lang="en-US" dirty="0"/>
-              <a:t>Now we are going to copy the board summary. Write the title and the headings neatly in your notebooks. I will give you enough time for each slide, so do not rush.</a:t>
+              <a:t>Here is the question for Activity 3: Why does Garoua have rain in July and not in January? Take one minute to think and write your answer in your rough notebook.</a:t>
             </a:r>
             <a:endParaRPr lang="en-US" dirty="0"/>
           </a:p>
@@ -2394,7 +2398,7 @@
           <a:p>
             <a:r>
               <a:rPr lang="en-US" dirty="0"/>
-              <a:t>Let us copy Pressure Belts. The major pressure belts are the following. On this slide we have Pressure belt and Equatorial Low. Write each point on a new line, with the key term first, and explain it in your own words when we revise. When you finish, we go to the next slide.</a:t>
+              <a:t>Let us check the answer together. In July, the rain belt and the moist south-west wind reach Garoua.</a:t>
             </a:r>
             <a:endParaRPr lang="en-US" dirty="0"/>
           </a:p>
@@ -2570,7 +2574,7 @@
           <a:p>
             <a:r>
               <a:rPr lang="en-US" dirty="0"/>
-              <a:t>We continue with Pressure Belts. On this slide we have Sub-tropical Highs and Temperate Lows and Polar Highs. Write each point on a new line, with the key term first, and explain it in your own words when we revise.</a:t>
+              <a:t>Now we are going to copy the board summary. Write the title and the headings neatly in your notebooks. I will give you enough time for each slide, so do not rush.</a:t>
             </a:r>
             <a:endParaRPr lang="en-US" dirty="0"/>
           </a:p>
@@ -2658,7 +2662,7 @@
           <a:p>
             <a:r>
               <a:rPr lang="en-US" dirty="0"/>
-              <a:t>Now draw this illustration in your notebook: pressure belts and planetary winds. Give it a title and label it clearly.</a:t>
+              <a:t>Let us copy the definitions. The key terms of this lesson are defined as follows. On this slide we have Pressure belt and Planetary winds. Write each point on a new line, with the key term first, and explain it in your own words when we revise.</a:t>
             </a:r>
             <a:endParaRPr lang="en-US" dirty="0"/>
           </a:p>
@@ -2746,7 +2750,7 @@
           <a:p>
             <a:r>
               <a:rPr lang="en-US" dirty="0"/>
-              <a:t>Let us copy Planetary Winds. The planetary winds blow between the pressure belts as follows. On this slide we have Trade winds and Westerlies. Write each point on a new line, with the key term first, and explain it in your own words when we revise. When you finish, we go to the next slide.</a:t>
+              <a:t>Let us copy Meaning of Pressure Belts: Major Types. The major pressure belts are the following. Copy the point on Equatorial Low (0°) on the left, then draw the diagram on the right: pressure belts. Give it a title and label it clearly.</a:t>
             </a:r>
             <a:endParaRPr lang="en-US" dirty="0"/>
           </a:p>
@@ -2834,7 +2838,7 @@
           <a:p>
             <a:r>
               <a:rPr lang="en-US" dirty="0"/>
-              <a:t>We continue with Planetary Winds. On this slide we have Polar easterlies and Garoua. Write each point on a new line, with the key term first, and explain it in your own words when we revise.</a:t>
+              <a:t>We continue with Meaning of Pressure Belts: Major Types. On this slide we have Sub-tropical Highs (about 30° N and S) and Temperate Lows (about 60° N and S). Write each point on a new line, with the key term first, and explain it in your own words when we revise. When you finish, we go to the next slide.</a:t>
             </a:r>
             <a:endParaRPr lang="en-US" dirty="0"/>
           </a:p>
@@ -2922,7 +2926,7 @@
           <a:p>
             <a:r>
               <a:rPr lang="en-US" dirty="0"/>
-              <a:t>Now let us check what you have understood. Question 1: Where is the Equatorial Low? Answer in your exercise book.</a:t>
+              <a:t>We continue with Meaning of Pressure Belts: Major Types. On this slide we have Polar Highs (90° N and S). Write each point on a new line, with the key term first, and explain it in your own words when we revise.</a:t>
             </a:r>
             <a:endParaRPr lang="en-US" dirty="0"/>
           </a:p>
@@ -3010,7 +3014,7 @@
           <a:p>
             <a:r>
               <a:rPr lang="en-US" dirty="0"/>
-              <a:t>The expected answer is: at the Equator (0°). If you got it right, well done.</a:t>
+              <a:t>Let us copy Illustration of Pressure Belts and Planetary Winds. The planetary winds blow between the pressure belts as follows. Copy the point on Trade winds on the left, then draw the diagram on the right: planetary winds. Give it a title and label it clearly.</a:t>
             </a:r>
             <a:endParaRPr lang="en-US" dirty="0"/>
           </a:p>
@@ -3098,7 +3102,7 @@
           <a:p>
             <a:r>
               <a:rPr lang="en-US" dirty="0"/>
-              <a:t>Now let us check what you have understood. Question 2: Which wind brings rain to Garoua? Answer in your exercise book.</a:t>
+              <a:t>We continue with Illustration of Pressure Belts and Planetary Winds. On this slide we have Westerlies, Polar easterlies and Deflection. Write each point on a new line, with the key term first, and explain it in your own words when we revise.</a:t>
             </a:r>
             <a:endParaRPr lang="en-US" dirty="0"/>
           </a:p>
@@ -3186,7 +3190,7 @@
           <a:p>
             <a:r>
               <a:rPr lang="en-US" dirty="0"/>
-              <a:t>The expected answer is: the south-west wind (monsoon) in the wet season. If you got it right, well done.</a:t>
+              <a:t>Copy the point on Seasonal shift on the left, then draw the diagram on the right: the rain belt in July. Give it a title and label it clearly.</a:t>
             </a:r>
             <a:endParaRPr lang="en-US" dirty="0"/>
           </a:p>
@@ -3274,7 +3278,7 @@
           <a:p>
             <a:r>
               <a:rPr lang="en-US" dirty="0"/>
-              <a:t>For those who need more practice, fill in the blanks in your exercise book. The answers are: number 1, low; number 2, Trade; number 3, Harmattan.</a:t>
+              <a:t>Now let us check what you have understood. Question 1: Where is the Equatorial Low? Answer in your exercise book.</a:t>
             </a:r>
             <a:endParaRPr lang="en-US" dirty="0"/>
           </a:p>
@@ -3362,7 +3366,7 @@
           <a:p>
             <a:r>
               <a:rPr lang="en-US" dirty="0"/>
-              <a:t>For your homework: Ask someone who has lived by the sea (Douala, Kribi or Limbe) or in the mountains (Buea, Mokolo) whether the wind changes between day and night. Write down what they say. We shall correct it at the beginning of our next lesson.</a:t>
+              <a:t>The expected answer is: at the Equator (0°). If you got it right, well done.</a:t>
             </a:r>
             <a:endParaRPr lang="en-US" dirty="0"/>
           </a:p>
@@ -3538,7 +3542,7 @@
           <a:p>
             <a:r>
               <a:rPr lang="en-US" dirty="0"/>
-              <a:t>Our next lesson will be on Lesson 37: Local Winds. Thank you for your attention, and see you next time.</a:t>
+              <a:t>Now let us check what you have understood. Question 2: Which wind brings rain to Garoua? Answer in your exercise book.</a:t>
             </a:r>
             <a:endParaRPr lang="en-US" dirty="0"/>
           </a:p>
@@ -3626,7 +3630,7 @@
           <a:p>
             <a:r>
               <a:rPr lang="en-US" dirty="0"/>
-              <a:t>Let us play the bilingual game. I say a word in English, and you give me the French word. Then we do the reverse.</a:t>
+              <a:t>The expected answer is: the south-west wind (monsoon) in the wet season. If you got it right, well done.</a:t>
             </a:r>
             <a:endParaRPr lang="en-US" dirty="0"/>
           </a:p>
@@ -3714,7 +3718,7 @@
           <a:p>
             <a:r>
               <a:rPr lang="en-US" dirty="0"/>
-              <a:t>I record this information in the official logbook of the class after the lesson.</a:t>
+              <a:t>For those who need more practice, fill in the blanks in your exercise book. The answers are: number 1, low; number 2, Trade; number 3, Harmattan.</a:t>
             </a:r>
             <a:endParaRPr lang="en-US" dirty="0"/>
           </a:p>
@@ -3802,7 +3806,7 @@
           <a:p>
             <a:r>
               <a:rPr lang="en-US" dirty="0"/>
-              <a:t>I complete the second page of the logbook: the matter taught, the evaluation, the homework and the attendance.</a:t>
+              <a:t>For your homework: Ask someone who has lived by the sea (Douala, Kribi or Limbe) or in the mountains (Buea, Mokolo) whether the wind changes between day and night. Write down what they say. We shall correct it at the beginning of our next lesson.</a:t>
             </a:r>
             <a:endParaRPr lang="en-US" dirty="0"/>
           </a:p>
@@ -3890,7 +3894,7 @@
           <a:p>
             <a:r>
               <a:rPr lang="en-US" dirty="0"/>
-              <a:t>This slide is for me, the teacher: it gives the timing of the lesson and what to do if the projector is not available.</a:t>
+              <a:t>Our next lesson will be on Lesson 37: Local Winds. Thank you for your attention, and see you next time.</a:t>
             </a:r>
             <a:endParaRPr lang="en-US" dirty="0"/>
           </a:p>
@@ -3978,7 +3982,7 @@
           <a:p>
             <a:r>
               <a:rPr lang="en-US" dirty="0"/>
-              <a:t>These are the references and picture credits used to prepare this lesson.</a:t>
+              <a:t>Let us play the bilingual game. I say a word in English, and you give me the French word. Then we do the reverse.</a:t>
             </a:r>
             <a:endParaRPr lang="en-US" dirty="0"/>
           </a:p>
@@ -4002,6 +4006,358 @@
             <a:fld id="{F7021451-1387-4CA6-816F-3879F97B5CBC}" type="slidenum">
               <a:rPr lang="en-US"/>
               <a:t>45</a:t>
+            </a:fld>
+            <a:endParaRPr lang="en-US"/>
+          </a:p>
+        </p:txBody>
+      </p:sp>
+    </p:spTree>
+    <p:extLst>
+      <p:ext uri="{BB962C8B-B14F-4D97-AF65-F5344CB8AC3E}">
+        <p14:creationId xmlns:p14="http://schemas.microsoft.com/office/powerpoint/2010/main" val="1024086991"/>
+      </p:ext>
+    </p:extLst>
+  </p:cSld>
+  <p:clrMapOvr>
+    <a:masterClrMapping/>
+  </p:clrMapOvr>
+</p:notes>
+</file>
+
+<file path=ppt/notesSlides/notesSlide46.xml><?xml version="1.0" encoding="utf-8"?>
+<p:notes xmlns:a="http://schemas.openxmlformats.org/drawingml/2006/main" xmlns:r="http://schemas.openxmlformats.org/officeDocument/2006/relationships" xmlns:p="http://schemas.openxmlformats.org/presentationml/2006/main">
+  <p:cSld>
+    <p:spTree>
+      <p:nvGrpSpPr>
+        <p:cNvPr id="1" name=""/>
+        <p:cNvGrpSpPr/>
+        <p:nvPr/>
+      </p:nvGrpSpPr>
+      <p:grpSpPr>
+        <a:xfrm>
+          <a:off x="0" y="0"/>
+          <a:ext cx="0" cy="0"/>
+          <a:chOff x="0" y="0"/>
+          <a:chExt cx="0" cy="0"/>
+        </a:xfrm>
+      </p:grpSpPr>
+      <p:sp>
+        <p:nvSpPr>
+          <p:cNvPr id="2" name="Slide Image Placeholder 1"/>
+          <p:cNvSpPr>
+            <a:spLocks noGrp="1" noRot="1" noChangeAspect="1"/>
+          </p:cNvSpPr>
+          <p:nvPr>
+            <p:ph type="sldImg"/>
+          </p:nvPr>
+        </p:nvSpPr>
+        <p:spPr/>
+      </p:sp>
+      <p:sp>
+        <p:nvSpPr>
+          <p:cNvPr id="3" name="Notes Placeholder 2"/>
+          <p:cNvSpPr>
+            <a:spLocks noGrp="1"/>
+          </p:cNvSpPr>
+          <p:nvPr>
+            <p:ph type="body" idx="1"/>
+          </p:nvPr>
+        </p:nvSpPr>
+        <p:spPr/>
+        <p:txBody>
+          <a:bodyPr/>
+          <a:lstStyle/>
+          <a:p>
+            <a:r>
+              <a:rPr lang="en-US" dirty="0"/>
+              <a:t>I record this information in the official logbook of the class after the lesson.</a:t>
+            </a:r>
+            <a:endParaRPr lang="en-US" dirty="0"/>
+          </a:p>
+        </p:txBody>
+      </p:sp>
+      <p:sp>
+        <p:nvSpPr>
+          <p:cNvPr id="4" name="Slide Number Placeholder 3"/>
+          <p:cNvSpPr>
+            <a:spLocks noGrp="1"/>
+          </p:cNvSpPr>
+          <p:nvPr>
+            <p:ph type="sldNum" sz="quarter" idx="10"/>
+          </p:nvPr>
+        </p:nvSpPr>
+        <p:spPr/>
+        <p:txBody>
+          <a:bodyPr/>
+          <a:lstStyle/>
+          <a:p>
+            <a:fld id="{F7021451-1387-4CA6-816F-3879F97B5CBC}" type="slidenum">
+              <a:rPr lang="en-US"/>
+              <a:t>46</a:t>
+            </a:fld>
+            <a:endParaRPr lang="en-US"/>
+          </a:p>
+        </p:txBody>
+      </p:sp>
+    </p:spTree>
+    <p:extLst>
+      <p:ext uri="{BB962C8B-B14F-4D97-AF65-F5344CB8AC3E}">
+        <p14:creationId xmlns:p14="http://schemas.microsoft.com/office/powerpoint/2010/main" val="1024086991"/>
+      </p:ext>
+    </p:extLst>
+  </p:cSld>
+  <p:clrMapOvr>
+    <a:masterClrMapping/>
+  </p:clrMapOvr>
+</p:notes>
+</file>
+
+<file path=ppt/notesSlides/notesSlide47.xml><?xml version="1.0" encoding="utf-8"?>
+<p:notes xmlns:a="http://schemas.openxmlformats.org/drawingml/2006/main" xmlns:r="http://schemas.openxmlformats.org/officeDocument/2006/relationships" xmlns:p="http://schemas.openxmlformats.org/presentationml/2006/main">
+  <p:cSld>
+    <p:spTree>
+      <p:nvGrpSpPr>
+        <p:cNvPr id="1" name=""/>
+        <p:cNvGrpSpPr/>
+        <p:nvPr/>
+      </p:nvGrpSpPr>
+      <p:grpSpPr>
+        <a:xfrm>
+          <a:off x="0" y="0"/>
+          <a:ext cx="0" cy="0"/>
+          <a:chOff x="0" y="0"/>
+          <a:chExt cx="0" cy="0"/>
+        </a:xfrm>
+      </p:grpSpPr>
+      <p:sp>
+        <p:nvSpPr>
+          <p:cNvPr id="2" name="Slide Image Placeholder 1"/>
+          <p:cNvSpPr>
+            <a:spLocks noGrp="1" noRot="1" noChangeAspect="1"/>
+          </p:cNvSpPr>
+          <p:nvPr>
+            <p:ph type="sldImg"/>
+          </p:nvPr>
+        </p:nvSpPr>
+        <p:spPr/>
+      </p:sp>
+      <p:sp>
+        <p:nvSpPr>
+          <p:cNvPr id="3" name="Notes Placeholder 2"/>
+          <p:cNvSpPr>
+            <a:spLocks noGrp="1"/>
+          </p:cNvSpPr>
+          <p:nvPr>
+            <p:ph type="body" idx="1"/>
+          </p:nvPr>
+        </p:nvSpPr>
+        <p:spPr/>
+        <p:txBody>
+          <a:bodyPr/>
+          <a:lstStyle/>
+          <a:p>
+            <a:r>
+              <a:rPr lang="en-US" dirty="0"/>
+              <a:t>I complete the second page of the logbook: the matter taught, the evaluation, the homework and the attendance.</a:t>
+            </a:r>
+            <a:endParaRPr lang="en-US" dirty="0"/>
+          </a:p>
+        </p:txBody>
+      </p:sp>
+      <p:sp>
+        <p:nvSpPr>
+          <p:cNvPr id="4" name="Slide Number Placeholder 3"/>
+          <p:cNvSpPr>
+            <a:spLocks noGrp="1"/>
+          </p:cNvSpPr>
+          <p:nvPr>
+            <p:ph type="sldNum" sz="quarter" idx="10"/>
+          </p:nvPr>
+        </p:nvSpPr>
+        <p:spPr/>
+        <p:txBody>
+          <a:bodyPr/>
+          <a:lstStyle/>
+          <a:p>
+            <a:fld id="{F7021451-1387-4CA6-816F-3879F97B5CBC}" type="slidenum">
+              <a:rPr lang="en-US"/>
+              <a:t>47</a:t>
+            </a:fld>
+            <a:endParaRPr lang="en-US"/>
+          </a:p>
+        </p:txBody>
+      </p:sp>
+    </p:spTree>
+    <p:extLst>
+      <p:ext uri="{BB962C8B-B14F-4D97-AF65-F5344CB8AC3E}">
+        <p14:creationId xmlns:p14="http://schemas.microsoft.com/office/powerpoint/2010/main" val="1024086991"/>
+      </p:ext>
+    </p:extLst>
+  </p:cSld>
+  <p:clrMapOvr>
+    <a:masterClrMapping/>
+  </p:clrMapOvr>
+</p:notes>
+</file>
+
+<file path=ppt/notesSlides/notesSlide48.xml><?xml version="1.0" encoding="utf-8"?>
+<p:notes xmlns:a="http://schemas.openxmlformats.org/drawingml/2006/main" xmlns:r="http://schemas.openxmlformats.org/officeDocument/2006/relationships" xmlns:p="http://schemas.openxmlformats.org/presentationml/2006/main">
+  <p:cSld>
+    <p:spTree>
+      <p:nvGrpSpPr>
+        <p:cNvPr id="1" name=""/>
+        <p:cNvGrpSpPr/>
+        <p:nvPr/>
+      </p:nvGrpSpPr>
+      <p:grpSpPr>
+        <a:xfrm>
+          <a:off x="0" y="0"/>
+          <a:ext cx="0" cy="0"/>
+          <a:chOff x="0" y="0"/>
+          <a:chExt cx="0" cy="0"/>
+        </a:xfrm>
+      </p:grpSpPr>
+      <p:sp>
+        <p:nvSpPr>
+          <p:cNvPr id="2" name="Slide Image Placeholder 1"/>
+          <p:cNvSpPr>
+            <a:spLocks noGrp="1" noRot="1" noChangeAspect="1"/>
+          </p:cNvSpPr>
+          <p:nvPr>
+            <p:ph type="sldImg"/>
+          </p:nvPr>
+        </p:nvSpPr>
+        <p:spPr/>
+      </p:sp>
+      <p:sp>
+        <p:nvSpPr>
+          <p:cNvPr id="3" name="Notes Placeholder 2"/>
+          <p:cNvSpPr>
+            <a:spLocks noGrp="1"/>
+          </p:cNvSpPr>
+          <p:nvPr>
+            <p:ph type="body" idx="1"/>
+          </p:nvPr>
+        </p:nvSpPr>
+        <p:spPr/>
+        <p:txBody>
+          <a:bodyPr/>
+          <a:lstStyle/>
+          <a:p>
+            <a:r>
+              <a:rPr lang="en-US" dirty="0"/>
+              <a:t>This slide is for me, the teacher: it gives the timing of the lesson and what to do if the projector is not available.</a:t>
+            </a:r>
+            <a:endParaRPr lang="en-US" dirty="0"/>
+          </a:p>
+        </p:txBody>
+      </p:sp>
+      <p:sp>
+        <p:nvSpPr>
+          <p:cNvPr id="4" name="Slide Number Placeholder 3"/>
+          <p:cNvSpPr>
+            <a:spLocks noGrp="1"/>
+          </p:cNvSpPr>
+          <p:nvPr>
+            <p:ph type="sldNum" sz="quarter" idx="10"/>
+          </p:nvPr>
+        </p:nvSpPr>
+        <p:spPr/>
+        <p:txBody>
+          <a:bodyPr/>
+          <a:lstStyle/>
+          <a:p>
+            <a:fld id="{F7021451-1387-4CA6-816F-3879F97B5CBC}" type="slidenum">
+              <a:rPr lang="en-US"/>
+              <a:t>48</a:t>
+            </a:fld>
+            <a:endParaRPr lang="en-US"/>
+          </a:p>
+        </p:txBody>
+      </p:sp>
+    </p:spTree>
+    <p:extLst>
+      <p:ext uri="{BB962C8B-B14F-4D97-AF65-F5344CB8AC3E}">
+        <p14:creationId xmlns:p14="http://schemas.microsoft.com/office/powerpoint/2010/main" val="1024086991"/>
+      </p:ext>
+    </p:extLst>
+  </p:cSld>
+  <p:clrMapOvr>
+    <a:masterClrMapping/>
+  </p:clrMapOvr>
+</p:notes>
+</file>
+
+<file path=ppt/notesSlides/notesSlide49.xml><?xml version="1.0" encoding="utf-8"?>
+<p:notes xmlns:a="http://schemas.openxmlformats.org/drawingml/2006/main" xmlns:r="http://schemas.openxmlformats.org/officeDocument/2006/relationships" xmlns:p="http://schemas.openxmlformats.org/presentationml/2006/main">
+  <p:cSld>
+    <p:spTree>
+      <p:nvGrpSpPr>
+        <p:cNvPr id="1" name=""/>
+        <p:cNvGrpSpPr/>
+        <p:nvPr/>
+      </p:nvGrpSpPr>
+      <p:grpSpPr>
+        <a:xfrm>
+          <a:off x="0" y="0"/>
+          <a:ext cx="0" cy="0"/>
+          <a:chOff x="0" y="0"/>
+          <a:chExt cx="0" cy="0"/>
+        </a:xfrm>
+      </p:grpSpPr>
+      <p:sp>
+        <p:nvSpPr>
+          <p:cNvPr id="2" name="Slide Image Placeholder 1"/>
+          <p:cNvSpPr>
+            <a:spLocks noGrp="1" noRot="1" noChangeAspect="1"/>
+          </p:cNvSpPr>
+          <p:nvPr>
+            <p:ph type="sldImg"/>
+          </p:nvPr>
+        </p:nvSpPr>
+        <p:spPr/>
+      </p:sp>
+      <p:sp>
+        <p:nvSpPr>
+          <p:cNvPr id="3" name="Notes Placeholder 2"/>
+          <p:cNvSpPr>
+            <a:spLocks noGrp="1"/>
+          </p:cNvSpPr>
+          <p:nvPr>
+            <p:ph type="body" idx="1"/>
+          </p:nvPr>
+        </p:nvSpPr>
+        <p:spPr/>
+        <p:txBody>
+          <a:bodyPr/>
+          <a:lstStyle/>
+          <a:p>
+            <a:r>
+              <a:rPr lang="en-US" dirty="0"/>
+              <a:t>These are the references and picture credits used to prepare this lesson.</a:t>
+            </a:r>
+            <a:endParaRPr lang="en-US" dirty="0"/>
+          </a:p>
+        </p:txBody>
+      </p:sp>
+      <p:sp>
+        <p:nvSpPr>
+          <p:cNvPr id="4" name="Slide Number Placeholder 3"/>
+          <p:cNvSpPr>
+            <a:spLocks noGrp="1"/>
+          </p:cNvSpPr>
+          <p:nvPr>
+            <p:ph type="sldNum" sz="quarter" idx="10"/>
+          </p:nvPr>
+        </p:nvSpPr>
+        <p:spPr/>
+        <p:txBody>
+          <a:bodyPr/>
+          <a:lstStyle/>
+          <a:p>
+            <a:fld id="{F7021451-1387-4CA6-816F-3879F97B5CBC}" type="slidenum">
+              <a:rPr lang="en-US"/>
+              <a:t>49</a:t>
             </a:fld>
             <a:endParaRPr lang="en-US"/>
           </a:p>
@@ -5798,7 +6154,7 @@
         <p:spPr>
           <a:xfrm>
             <a:off x="0" y="658368"/>
-            <a:ext cx="5120640" cy="5833872"/>
+            <a:ext cx="2468880" cy="5833872"/>
           </a:xfrm>
           <a:prstGeom prst="rect">
             <a:avLst/>
@@ -5813,8 +6169,8 @@
         </p:nvSpPr>
         <p:spPr>
           <a:xfrm>
-            <a:off x="5349240" y="1005840"/>
-            <a:ext cx="6522415" cy="731520"/>
+            <a:off x="2697480" y="1005840"/>
+            <a:ext cx="9174175" cy="731520"/>
           </a:xfrm>
           <a:prstGeom prst="rect">
             <a:avLst/>
@@ -5854,8 +6210,8 @@
         </p:nvSpPr>
         <p:spPr>
           <a:xfrm>
-            <a:off x="5349240" y="1783080"/>
-            <a:ext cx="6522415" cy="4663440"/>
+            <a:off x="2697480" y="1783080"/>
+            <a:ext cx="9174175" cy="4663440"/>
           </a:xfrm>
           <a:prstGeom prst="rect">
             <a:avLst/>
@@ -5882,7 +6238,7 @@
                 <a:ea typeface="Times New Roman" pitchFamily="34" charset="-122"/>
                 <a:cs typeface="Times New Roman" pitchFamily="34" charset="-120"/>
               </a:rPr>
-              <a:t>From June to September, the wind in Garoua comes from the south-west and brings rain. From December to February, the dry Harmattan comes from the north-east.</a:t>
+              <a:t>From June to September, the wind in Garoua comes from the south-west and brings rain. From December to February, the dry, dusty Harmattan comes from the north-east. Hamidou asks: "Why do the winds change direction, and where do they come from?"</a:t>
             </a:r>
             <a:endParaRPr lang="en-US" sz="4000" dirty="0"/>
           </a:p>
@@ -6320,7 +6676,7 @@
                 <a:ea typeface="Times New Roman" pitchFamily="34" charset="-122"/>
                 <a:cs typeface="Times New Roman" pitchFamily="34" charset="-120"/>
               </a:rPr>
-              <a:t>We want to know why the wind changes with the seasons.</a:t>
+              <a:t>Hamidou does not know why the winds of Garoua change direction during the year.</a:t>
             </a:r>
             <a:endParaRPr lang="en-US" sz="4000" dirty="0"/>
           </a:p>
@@ -6539,7 +6895,7 @@
                 <a:ea typeface="Times New Roman" pitchFamily="34" charset="-122"/>
                 <a:cs typeface="Times New Roman" pitchFamily="34" charset="-120"/>
               </a:rPr>
-              <a:t>Which wind brings rain?</a:t>
+              <a:t>From where does the rainy wind come?</a:t>
             </a:r>
             <a:endParaRPr lang="en-US" sz="4000" dirty="0"/>
           </a:p>
@@ -6758,7 +7114,7 @@
                 <a:ea typeface="Times New Roman" pitchFamily="34" charset="-122"/>
                 <a:cs typeface="Times New Roman" pitchFamily="34" charset="-120"/>
               </a:rPr>
-              <a:t>The south-west wind.</a:t>
+              <a:t>From the south-west.</a:t>
             </a:r>
             <a:endParaRPr lang="en-US" sz="4000" dirty="0"/>
           </a:p>
@@ -6977,7 +7333,7 @@
                 <a:ea typeface="Times New Roman" pitchFamily="34" charset="-122"/>
                 <a:cs typeface="Times New Roman" pitchFamily="34" charset="-120"/>
               </a:rPr>
-              <a:t>Which wind is dry?</a:t>
+              <a:t>From where does the Harmattan come?</a:t>
             </a:r>
             <a:endParaRPr lang="en-US" sz="4000" dirty="0"/>
           </a:p>
@@ -7196,7 +7552,7 @@
                 <a:ea typeface="Times New Roman" pitchFamily="34" charset="-122"/>
                 <a:cs typeface="Times New Roman" pitchFamily="34" charset="-120"/>
               </a:rPr>
-              <a:t>The Harmattan, from the north-east.</a:t>
+              <a:t>From the north-east (the Sahara).</a:t>
             </a:r>
             <a:endParaRPr lang="en-US" sz="4000" dirty="0"/>
           </a:p>
@@ -7848,7 +8204,7 @@
                 <a:ea typeface="Times New Roman" pitchFamily="34" charset="-122"/>
                 <a:cs typeface="Times New Roman" pitchFamily="34" charset="-120"/>
               </a:rPr>
-              <a:t>Pressure belts of the Northern Hemisphere.</a:t>
+              <a:t>Pressure belts of the Earth.</a:t>
             </a:r>
             <a:endParaRPr lang="en-US" sz="1800" dirty="0"/>
           </a:p>
@@ -8620,7 +8976,7 @@
                 <a:ea typeface="Times New Roman" pitchFamily="34" charset="-122"/>
                 <a:cs typeface="Times New Roman" pitchFamily="34" charset="-120"/>
               </a:rPr>
-              <a:t>Activity 1: Question</a:t>
+              <a:t>Activity 1: Question 1</a:t>
             </a:r>
             <a:endParaRPr lang="en-US" sz="3600" dirty="0"/>
           </a:p>
@@ -8662,7 +9018,7 @@
                 <a:ea typeface="Times New Roman" pitchFamily="34" charset="-122"/>
                 <a:cs typeface="Times New Roman" pitchFamily="34" charset="-120"/>
               </a:rPr>
-              <a:t>Is the pressure high or low at the Equator? Why?</a:t>
+              <a:t>Is the pressure high or low at the Equator?</a:t>
             </a:r>
             <a:endParaRPr lang="en-US" sz="4000" dirty="0"/>
           </a:p>
@@ -8839,7 +9195,7 @@
                 <a:ea typeface="Times New Roman" pitchFamily="34" charset="-122"/>
                 <a:cs typeface="Times New Roman" pitchFamily="34" charset="-120"/>
               </a:rPr>
-              <a:t>Activity 1: Answer</a:t>
+              <a:t>Activity 1: Answer 1</a:t>
             </a:r>
             <a:endParaRPr lang="en-US" sz="3600" dirty="0"/>
           </a:p>
@@ -8881,7 +9237,7 @@
                 <a:ea typeface="Times New Roman" pitchFamily="34" charset="-122"/>
                 <a:cs typeface="Times New Roman" pitchFamily="34" charset="-120"/>
               </a:rPr>
-              <a:t>Low. Hot air rises there.</a:t>
+              <a:t>Low.</a:t>
             </a:r>
             <a:endParaRPr lang="en-US" sz="4000" dirty="0"/>
           </a:p>
@@ -8993,54 +9349,15 @@
                 <a:ea typeface="Calibri" pitchFamily="34" charset="-122"/>
                 <a:cs typeface="Calibri" pitchFamily="34" charset="-120"/>
               </a:rPr>
-              <a:t>2. PLANETARY WINDS</a:t>
+              <a:t>1. PRESSURE BELTS</a:t>
             </a:r>
             <a:endParaRPr lang="en-US" sz="1400" dirty="0"/>
-          </a:p>
-        </p:txBody>
-      </p:sp>
-      <p:sp>
-        <p:nvSpPr>
-          <p:cNvPr id="3" name="Text 1"/>
-          <p:cNvSpPr/>
-          <p:nvPr/>
-        </p:nvSpPr>
-        <p:spPr>
-          <a:xfrm>
-            <a:off x="457200" y="1005840"/>
-            <a:ext cx="11277295" cy="731520"/>
-          </a:xfrm>
-          <a:prstGeom prst="rect">
-            <a:avLst/>
-          </a:prstGeom>
-          <a:noFill/>
-          <a:ln/>
-        </p:spPr>
-        <p:txBody>
-          <a:bodyPr wrap="square" lIns="0" tIns="0" rIns="0" bIns="0" rtlCol="0" anchor="ctr"/>
-          <a:lstStyle/>
-          <a:p>
-            <a:pPr algn="ctr" indent="0" marL="0">
-              <a:buNone/>
-            </a:pPr>
-            <a:r>
-              <a:rPr lang="en-US" sz="3600" b="1" dirty="0">
-                <a:solidFill>
-                  <a:srgbClr val="990011"/>
-                </a:solidFill>
-                <a:latin typeface="Times New Roman" pitchFamily="34" charset="0"/>
-                <a:ea typeface="Times New Roman" pitchFamily="34" charset="-122"/>
-                <a:cs typeface="Times New Roman" pitchFamily="34" charset="-120"/>
-              </a:rPr>
-              <a:t>Activity 2</a:t>
-            </a:r>
-            <a:endParaRPr lang="en-US" sz="3600" dirty="0"/>
           </a:p>
         </p:txBody>
       </p:sp>
       <p:pic>
         <p:nvPicPr>
-          <p:cNvPr id="4" name="Image 0" descr="/home/claude/f4/img/v2/f2t_harmattan.jpg">    </p:cNvPr>
+          <p:cNvPr id="3" name="Image 0" descr="/home/claude/f4/img/minesec_sheet.png">    </p:cNvPr>
           <p:cNvPicPr>
             <a:picLocks noChangeAspect="1"/>
           </p:cNvPicPr>
@@ -9054,8 +9371,8 @@
         </p:blipFill>
         <p:spPr>
           <a:xfrm>
-            <a:off x="2246610" y="1783080"/>
-            <a:ext cx="7698475" cy="4270248"/>
+            <a:off x="0" y="658368"/>
+            <a:ext cx="5120640" cy="5833872"/>
           </a:xfrm>
           <a:prstGeom prst="rect">
             <a:avLst/>
@@ -9064,14 +9381,14 @@
       </p:pic>
       <p:sp>
         <p:nvSpPr>
-          <p:cNvPr id="5" name="Text 2"/>
+          <p:cNvPr id="4" name="Text 1"/>
           <p:cNvSpPr/>
           <p:nvPr/>
         </p:nvSpPr>
         <p:spPr>
           <a:xfrm>
-            <a:off x="457200" y="6089904"/>
-            <a:ext cx="11277295" cy="347472"/>
+            <a:off x="5349240" y="1005840"/>
+            <a:ext cx="6522415" cy="731520"/>
           </a:xfrm>
           <a:prstGeom prst="rect">
             <a:avLst/>
@@ -9080,24 +9397,68 @@
           <a:ln/>
         </p:spPr>
         <p:txBody>
-          <a:bodyPr wrap="square" lIns="0" tIns="0" rIns="0" bIns="0" rtlCol="0" anchor="ctr"/>
+          <a:bodyPr wrap="square" lIns="0" tIns="0" rIns="0" bIns="0" rtlCol="0" anchor="ctr">
+            <a:normAutofit/>
+          </a:bodyPr>
           <a:lstStyle/>
           <a:p>
             <a:pPr algn="ctr" indent="0" marL="0">
               <a:buNone/>
             </a:pPr>
             <a:r>
-              <a:rPr lang="en-US" sz="1800" i="1" dirty="0">
-                <a:solidFill>
-                  <a:srgbClr val="555555"/>
+              <a:rPr lang="en-US" sz="3600" b="1" dirty="0">
+                <a:solidFill>
+                  <a:srgbClr val="990011"/>
                 </a:solidFill>
                 <a:latin typeface="Times New Roman" pitchFamily="34" charset="0"/>
                 <a:ea typeface="Times New Roman" pitchFamily="34" charset="-122"/>
                 <a:cs typeface="Times New Roman" pitchFamily="34" charset="-120"/>
               </a:rPr>
-              <a:t>The sky during the Harmattan.</a:t>
-            </a:r>
-            <a:endParaRPr lang="en-US" sz="1800" dirty="0"/>
+              <a:t>Activity 1: Question 2</a:t>
+            </a:r>
+            <a:endParaRPr lang="en-US" sz="3600" dirty="0"/>
+          </a:p>
+        </p:txBody>
+      </p:sp>
+      <p:sp>
+        <p:nvSpPr>
+          <p:cNvPr id="5" name="Text 2"/>
+          <p:cNvSpPr/>
+          <p:nvPr/>
+        </p:nvSpPr>
+        <p:spPr>
+          <a:xfrm>
+            <a:off x="5349240" y="1783080"/>
+            <a:ext cx="6522415" cy="4663440"/>
+          </a:xfrm>
+          <a:prstGeom prst="rect">
+            <a:avLst/>
+          </a:prstGeom>
+          <a:noFill/>
+          <a:ln/>
+        </p:spPr>
+        <p:txBody>
+          <a:bodyPr wrap="square" lIns="0" tIns="0" rIns="0" bIns="0" rtlCol="0" anchor="t"/>
+          <a:lstStyle/>
+          <a:p>
+            <a:pPr algn="l" indent="0" marL="0">
+              <a:spcAft>
+                <a:spcPts val="800"/>
+              </a:spcAft>
+              <a:buNone/>
+            </a:pPr>
+            <a:r>
+              <a:rPr lang="en-US" sz="4000" dirty="0">
+                <a:solidFill>
+                  <a:srgbClr val="111111"/>
+                </a:solidFill>
+                <a:latin typeface="Times New Roman" pitchFamily="34" charset="0"/>
+                <a:ea typeface="Times New Roman" pitchFamily="34" charset="-122"/>
+                <a:cs typeface="Times New Roman" pitchFamily="34" charset="-120"/>
+              </a:rPr>
+              <a:t>Why?</a:t>
+            </a:r>
+            <a:endParaRPr lang="en-US" sz="4000" dirty="0"/>
           </a:p>
         </p:txBody>
       </p:sp>
@@ -9207,7 +9568,7 @@
                 <a:ea typeface="Calibri" pitchFamily="34" charset="-122"/>
                 <a:cs typeface="Calibri" pitchFamily="34" charset="-120"/>
               </a:rPr>
-              <a:t>2. PLANETARY WINDS</a:t>
+              <a:t>1. PRESSURE BELTS</a:t>
             </a:r>
             <a:endParaRPr lang="en-US" sz="1400" dirty="0"/>
           </a:p>
@@ -9272,7 +9633,7 @@
                 <a:ea typeface="Times New Roman" pitchFamily="34" charset="-122"/>
                 <a:cs typeface="Times New Roman" pitchFamily="34" charset="-120"/>
               </a:rPr>
-              <a:t>Activity 2: Question</a:t>
+              <a:t>Activity 1: Answer 2</a:t>
             </a:r>
             <a:endParaRPr lang="en-US" sz="3600" dirty="0"/>
           </a:p>
@@ -9314,7 +9675,7 @@
                 <a:ea typeface="Times New Roman" pitchFamily="34" charset="-122"/>
                 <a:cs typeface="Times New Roman" pitchFamily="34" charset="-120"/>
               </a:rPr>
-              <a:t>The Harmattan blows from the Sahara towards the Equator. Which planetary wind is it?</a:t>
+              <a:t>Hot air rises there.</a:t>
             </a:r>
             <a:endParaRPr lang="en-US" sz="4000" dirty="0"/>
           </a:p>
@@ -9432,9 +9793,48 @@
           </a:p>
         </p:txBody>
       </p:sp>
+      <p:sp>
+        <p:nvSpPr>
+          <p:cNvPr id="3" name="Text 1"/>
+          <p:cNvSpPr/>
+          <p:nvPr/>
+        </p:nvSpPr>
+        <p:spPr>
+          <a:xfrm>
+            <a:off x="457200" y="1005840"/>
+            <a:ext cx="11277295" cy="731520"/>
+          </a:xfrm>
+          <a:prstGeom prst="rect">
+            <a:avLst/>
+          </a:prstGeom>
+          <a:noFill/>
+          <a:ln/>
+        </p:spPr>
+        <p:txBody>
+          <a:bodyPr wrap="square" lIns="0" tIns="0" rIns="0" bIns="0" rtlCol="0" anchor="ctr"/>
+          <a:lstStyle/>
+          <a:p>
+            <a:pPr algn="ctr" indent="0" marL="0">
+              <a:buNone/>
+            </a:pPr>
+            <a:r>
+              <a:rPr lang="en-US" sz="3600" b="1" dirty="0">
+                <a:solidFill>
+                  <a:srgbClr val="990011"/>
+                </a:solidFill>
+                <a:latin typeface="Times New Roman" pitchFamily="34" charset="0"/>
+                <a:ea typeface="Times New Roman" pitchFamily="34" charset="-122"/>
+                <a:cs typeface="Times New Roman" pitchFamily="34" charset="-120"/>
+              </a:rPr>
+              <a:t>Activity 2</a:t>
+            </a:r>
+            <a:endParaRPr lang="en-US" sz="3600" dirty="0"/>
+          </a:p>
+        </p:txBody>
+      </p:sp>
       <p:pic>
         <p:nvPicPr>
-          <p:cNvPr id="3" name="Image 0" descr="/home/claude/f4/img/minesec_sheet.png">    </p:cNvPr>
+          <p:cNvPr id="4" name="Image 0" descr="/home/claude/f4/img/v2/f2t_harmattan.jpg">    </p:cNvPr>
           <p:cNvPicPr>
             <a:picLocks noChangeAspect="1"/>
           </p:cNvPicPr>
@@ -9448,8 +9848,8 @@
         </p:blipFill>
         <p:spPr>
           <a:xfrm>
-            <a:off x="0" y="658368"/>
-            <a:ext cx="5120640" cy="5833872"/>
+            <a:off x="2246610" y="1783080"/>
+            <a:ext cx="7698475" cy="4270248"/>
           </a:xfrm>
           <a:prstGeom prst="rect">
             <a:avLst/>
@@ -9458,14 +9858,14 @@
       </p:pic>
       <p:sp>
         <p:nvSpPr>
-          <p:cNvPr id="4" name="Text 1"/>
+          <p:cNvPr id="5" name="Text 2"/>
           <p:cNvSpPr/>
           <p:nvPr/>
         </p:nvSpPr>
         <p:spPr>
           <a:xfrm>
-            <a:off x="5349240" y="1005840"/>
-            <a:ext cx="6522415" cy="731520"/>
+            <a:off x="457200" y="6089904"/>
+            <a:ext cx="11277295" cy="347472"/>
           </a:xfrm>
           <a:prstGeom prst="rect">
             <a:avLst/>
@@ -9474,68 +9874,24 @@
           <a:ln/>
         </p:spPr>
         <p:txBody>
-          <a:bodyPr wrap="square" lIns="0" tIns="0" rIns="0" bIns="0" rtlCol="0" anchor="ctr">
-            <a:normAutofit/>
-          </a:bodyPr>
+          <a:bodyPr wrap="square" lIns="0" tIns="0" rIns="0" bIns="0" rtlCol="0" anchor="ctr"/>
           <a:lstStyle/>
           <a:p>
             <a:pPr algn="ctr" indent="0" marL="0">
               <a:buNone/>
             </a:pPr>
             <a:r>
-              <a:rPr lang="en-US" sz="3600" b="1" dirty="0">
-                <a:solidFill>
-                  <a:srgbClr val="990011"/>
+              <a:rPr lang="en-US" sz="1800" i="1" dirty="0">
+                <a:solidFill>
+                  <a:srgbClr val="555555"/>
                 </a:solidFill>
                 <a:latin typeface="Times New Roman" pitchFamily="34" charset="0"/>
                 <a:ea typeface="Times New Roman" pitchFamily="34" charset="-122"/>
                 <a:cs typeface="Times New Roman" pitchFamily="34" charset="-120"/>
               </a:rPr>
-              <a:t>Activity 2: Answer</a:t>
-            </a:r>
-            <a:endParaRPr lang="en-US" sz="3600" dirty="0"/>
-          </a:p>
-        </p:txBody>
-      </p:sp>
-      <p:sp>
-        <p:nvSpPr>
-          <p:cNvPr id="5" name="Text 2"/>
-          <p:cNvSpPr/>
-          <p:nvPr/>
-        </p:nvSpPr>
-        <p:spPr>
-          <a:xfrm>
-            <a:off x="5349240" y="1783080"/>
-            <a:ext cx="6522415" cy="4663440"/>
-          </a:xfrm>
-          <a:prstGeom prst="rect">
-            <a:avLst/>
-          </a:prstGeom>
-          <a:noFill/>
-          <a:ln/>
-        </p:spPr>
-        <p:txBody>
-          <a:bodyPr wrap="square" lIns="0" tIns="0" rIns="0" bIns="0" rtlCol="0" anchor="t"/>
-          <a:lstStyle/>
-          <a:p>
-            <a:pPr algn="l" indent="0" marL="0">
-              <a:spcAft>
-                <a:spcPts val="800"/>
-              </a:spcAft>
-              <a:buNone/>
-            </a:pPr>
-            <a:r>
-              <a:rPr lang="en-US" sz="4000" dirty="0">
-                <a:solidFill>
-                  <a:srgbClr val="111111"/>
-                </a:solidFill>
-                <a:latin typeface="Times New Roman" pitchFamily="34" charset="0"/>
-                <a:ea typeface="Times New Roman" pitchFamily="34" charset="-122"/>
-                <a:cs typeface="Times New Roman" pitchFamily="34" charset="-120"/>
-              </a:rPr>
-              <a:t>The north-east Trade Wind.</a:t>
-            </a:r>
-            <a:endParaRPr lang="en-US" sz="4000" dirty="0"/>
+              <a:t>Dusty Harmattan air.</a:t>
+            </a:r>
+            <a:endParaRPr lang="en-US" sz="1800" dirty="0"/>
           </a:p>
         </p:txBody>
       </p:sp>
@@ -9651,48 +10007,9 @@
           </a:p>
         </p:txBody>
       </p:sp>
-      <p:sp>
-        <p:nvSpPr>
-          <p:cNvPr id="3" name="Text 1"/>
-          <p:cNvSpPr/>
-          <p:nvPr/>
-        </p:nvSpPr>
-        <p:spPr>
-          <a:xfrm>
-            <a:off x="457200" y="1005840"/>
-            <a:ext cx="11277295" cy="731520"/>
-          </a:xfrm>
-          <a:prstGeom prst="rect">
-            <a:avLst/>
-          </a:prstGeom>
-          <a:noFill/>
-          <a:ln/>
-        </p:spPr>
-        <p:txBody>
-          <a:bodyPr wrap="square" lIns="0" tIns="0" rIns="0" bIns="0" rtlCol="0" anchor="ctr"/>
-          <a:lstStyle/>
-          <a:p>
-            <a:pPr algn="ctr" indent="0" marL="0">
-              <a:buNone/>
-            </a:pPr>
-            <a:r>
-              <a:rPr lang="en-US" sz="3600" b="1" dirty="0">
-                <a:solidFill>
-                  <a:srgbClr val="990011"/>
-                </a:solidFill>
-                <a:latin typeface="Times New Roman" pitchFamily="34" charset="0"/>
-                <a:ea typeface="Times New Roman" pitchFamily="34" charset="-122"/>
-                <a:cs typeface="Times New Roman" pitchFamily="34" charset="-120"/>
-              </a:rPr>
-              <a:t>Activity 3</a:t>
-            </a:r>
-            <a:endParaRPr lang="en-US" sz="3600" dirty="0"/>
-          </a:p>
-        </p:txBody>
-      </p:sp>
       <p:pic>
         <p:nvPicPr>
-          <p:cNvPr id="4" name="Image 0" descr="/home/claude/f4/img/v2/itcz.gif">    </p:cNvPr>
+          <p:cNvPr id="3" name="Image 0" descr="/home/claude/f4/img/minesec_sheet.png">    </p:cNvPr>
           <p:cNvPicPr>
             <a:picLocks noChangeAspect="1"/>
           </p:cNvPicPr>
@@ -9706,8 +10023,8 @@
         </p:blipFill>
         <p:spPr>
           <a:xfrm>
-            <a:off x="629930" y="1783080"/>
-            <a:ext cx="10931835" cy="4270248"/>
+            <a:off x="0" y="658368"/>
+            <a:ext cx="5120640" cy="5833872"/>
           </a:xfrm>
           <a:prstGeom prst="rect">
             <a:avLst/>
@@ -9716,14 +10033,14 @@
       </p:pic>
       <p:sp>
         <p:nvSpPr>
-          <p:cNvPr id="5" name="Text 2"/>
+          <p:cNvPr id="4" name="Text 1"/>
           <p:cNvSpPr/>
           <p:nvPr/>
         </p:nvSpPr>
         <p:spPr>
           <a:xfrm>
-            <a:off x="457200" y="6089904"/>
-            <a:ext cx="11277295" cy="347472"/>
+            <a:off x="5349240" y="1005840"/>
+            <a:ext cx="6522415" cy="731520"/>
           </a:xfrm>
           <a:prstGeom prst="rect">
             <a:avLst/>
@@ -9732,24 +10049,68 @@
           <a:ln/>
         </p:spPr>
         <p:txBody>
-          <a:bodyPr wrap="square" lIns="0" tIns="0" rIns="0" bIns="0" rtlCol="0" anchor="ctr"/>
+          <a:bodyPr wrap="square" lIns="0" tIns="0" rIns="0" bIns="0" rtlCol="0" anchor="ctr">
+            <a:normAutofit/>
+          </a:bodyPr>
           <a:lstStyle/>
           <a:p>
             <a:pPr algn="ctr" indent="0" marL="0">
               <a:buNone/>
             </a:pPr>
             <a:r>
-              <a:rPr lang="en-US" sz="1800" i="1" dirty="0">
-                <a:solidFill>
-                  <a:srgbClr val="555555"/>
+              <a:rPr lang="en-US" sz="3600" b="1" dirty="0">
+                <a:solidFill>
+                  <a:srgbClr val="990011"/>
                 </a:solidFill>
                 <a:latin typeface="Times New Roman" pitchFamily="34" charset="0"/>
                 <a:ea typeface="Times New Roman" pitchFamily="34" charset="-122"/>
                 <a:cs typeface="Times New Roman" pitchFamily="34" charset="-120"/>
               </a:rPr>
-              <a:t>Animation: the rain belt moves north in July and south in January.</a:t>
-            </a:r>
-            <a:endParaRPr lang="en-US" sz="1800" dirty="0"/>
+              <a:t>Activity 2: Question</a:t>
+            </a:r>
+            <a:endParaRPr lang="en-US" sz="3600" dirty="0"/>
+          </a:p>
+        </p:txBody>
+      </p:sp>
+      <p:sp>
+        <p:nvSpPr>
+          <p:cNvPr id="5" name="Text 2"/>
+          <p:cNvSpPr/>
+          <p:nvPr/>
+        </p:nvSpPr>
+        <p:spPr>
+          <a:xfrm>
+            <a:off x="5349240" y="1783080"/>
+            <a:ext cx="6522415" cy="4663440"/>
+          </a:xfrm>
+          <a:prstGeom prst="rect">
+            <a:avLst/>
+          </a:prstGeom>
+          <a:noFill/>
+          <a:ln/>
+        </p:spPr>
+        <p:txBody>
+          <a:bodyPr wrap="square" lIns="0" tIns="0" rIns="0" bIns="0" rtlCol="0" anchor="t"/>
+          <a:lstStyle/>
+          <a:p>
+            <a:pPr algn="l" indent="0" marL="0">
+              <a:spcAft>
+                <a:spcPts val="800"/>
+              </a:spcAft>
+              <a:buNone/>
+            </a:pPr>
+            <a:r>
+              <a:rPr lang="en-US" sz="4000" dirty="0">
+                <a:solidFill>
+                  <a:srgbClr val="111111"/>
+                </a:solidFill>
+                <a:latin typeface="Times New Roman" pitchFamily="34" charset="0"/>
+                <a:ea typeface="Times New Roman" pitchFamily="34" charset="-122"/>
+                <a:cs typeface="Times New Roman" pitchFamily="34" charset="-120"/>
+              </a:rPr>
+              <a:t>The Harmattan blows from the Sahara towards the Equator. Which planetary wind is it?</a:t>
+            </a:r>
+            <a:endParaRPr lang="en-US" sz="4000" dirty="0"/>
           </a:p>
         </p:txBody>
       </p:sp>
@@ -9924,7 +10285,7 @@
                 <a:ea typeface="Times New Roman" pitchFamily="34" charset="-122"/>
                 <a:cs typeface="Times New Roman" pitchFamily="34" charset="-120"/>
               </a:rPr>
-              <a:t>Activity 3: Question</a:t>
+              <a:t>Activity 2: Answer</a:t>
             </a:r>
             <a:endParaRPr lang="en-US" sz="3600" dirty="0"/>
           </a:p>
@@ -9966,7 +10327,7 @@
                 <a:ea typeface="Times New Roman" pitchFamily="34" charset="-122"/>
                 <a:cs typeface="Times New Roman" pitchFamily="34" charset="-120"/>
               </a:rPr>
-              <a:t>Why does Garoua have rain in July and not in January?</a:t>
+              <a:t>The north-east Trade Wind.</a:t>
             </a:r>
             <a:endParaRPr lang="en-US" sz="4000" dirty="0"/>
           </a:p>
@@ -10084,9 +10445,48 @@
           </a:p>
         </p:txBody>
       </p:sp>
+      <p:sp>
+        <p:nvSpPr>
+          <p:cNvPr id="3" name="Text 1"/>
+          <p:cNvSpPr/>
+          <p:nvPr/>
+        </p:nvSpPr>
+        <p:spPr>
+          <a:xfrm>
+            <a:off x="457200" y="1005840"/>
+            <a:ext cx="11277295" cy="731520"/>
+          </a:xfrm>
+          <a:prstGeom prst="rect">
+            <a:avLst/>
+          </a:prstGeom>
+          <a:noFill/>
+          <a:ln/>
+        </p:spPr>
+        <p:txBody>
+          <a:bodyPr wrap="square" lIns="0" tIns="0" rIns="0" bIns="0" rtlCol="0" anchor="ctr"/>
+          <a:lstStyle/>
+          <a:p>
+            <a:pPr algn="ctr" indent="0" marL="0">
+              <a:buNone/>
+            </a:pPr>
+            <a:r>
+              <a:rPr lang="en-US" sz="3600" b="1" dirty="0">
+                <a:solidFill>
+                  <a:srgbClr val="990011"/>
+                </a:solidFill>
+                <a:latin typeface="Times New Roman" pitchFamily="34" charset="0"/>
+                <a:ea typeface="Times New Roman" pitchFamily="34" charset="-122"/>
+                <a:cs typeface="Times New Roman" pitchFamily="34" charset="-120"/>
+              </a:rPr>
+              <a:t>Activity 3</a:t>
+            </a:r>
+            <a:endParaRPr lang="en-US" sz="3600" dirty="0"/>
+          </a:p>
+        </p:txBody>
+      </p:sp>
       <p:pic>
         <p:nvPicPr>
-          <p:cNvPr id="3" name="Image 0" descr="/home/claude/f4/img/minesec_sheet.png">    </p:cNvPr>
+          <p:cNvPr id="4" name="Image 0" descr="/home/claude/f4/img/v2/itcz.gif">    </p:cNvPr>
           <p:cNvPicPr>
             <a:picLocks noChangeAspect="1"/>
           </p:cNvPicPr>
@@ -10100,8 +10500,8 @@
         </p:blipFill>
         <p:spPr>
           <a:xfrm>
-            <a:off x="0" y="658368"/>
-            <a:ext cx="5120640" cy="5833872"/>
+            <a:off x="629930" y="1783080"/>
+            <a:ext cx="10931835" cy="4270248"/>
           </a:xfrm>
           <a:prstGeom prst="rect">
             <a:avLst/>
@@ -10110,14 +10510,14 @@
       </p:pic>
       <p:sp>
         <p:nvSpPr>
-          <p:cNvPr id="4" name="Text 1"/>
+          <p:cNvPr id="5" name="Text 2"/>
           <p:cNvSpPr/>
           <p:nvPr/>
         </p:nvSpPr>
         <p:spPr>
           <a:xfrm>
-            <a:off x="5349240" y="1005840"/>
-            <a:ext cx="6522415" cy="731520"/>
+            <a:off x="457200" y="6089904"/>
+            <a:ext cx="11277295" cy="347472"/>
           </a:xfrm>
           <a:prstGeom prst="rect">
             <a:avLst/>
@@ -10126,68 +10526,24 @@
           <a:ln/>
         </p:spPr>
         <p:txBody>
-          <a:bodyPr wrap="square" lIns="0" tIns="0" rIns="0" bIns="0" rtlCol="0" anchor="ctr">
-            <a:normAutofit/>
-          </a:bodyPr>
+          <a:bodyPr wrap="square" lIns="0" tIns="0" rIns="0" bIns="0" rtlCol="0" anchor="ctr"/>
           <a:lstStyle/>
           <a:p>
             <a:pPr algn="ctr" indent="0" marL="0">
               <a:buNone/>
             </a:pPr>
             <a:r>
-              <a:rPr lang="en-US" sz="3600" b="1" dirty="0">
-                <a:solidFill>
-                  <a:srgbClr val="990011"/>
+              <a:rPr lang="en-US" sz="1800" i="1" dirty="0">
+                <a:solidFill>
+                  <a:srgbClr val="555555"/>
                 </a:solidFill>
                 <a:latin typeface="Times New Roman" pitchFamily="34" charset="0"/>
                 <a:ea typeface="Times New Roman" pitchFamily="34" charset="-122"/>
                 <a:cs typeface="Times New Roman" pitchFamily="34" charset="-120"/>
               </a:rPr>
-              <a:t>Activity 3: Answer</a:t>
-            </a:r>
-            <a:endParaRPr lang="en-US" sz="3600" dirty="0"/>
-          </a:p>
-        </p:txBody>
-      </p:sp>
-      <p:sp>
-        <p:nvSpPr>
-          <p:cNvPr id="5" name="Text 2"/>
-          <p:cNvSpPr/>
-          <p:nvPr/>
-        </p:nvSpPr>
-        <p:spPr>
-          <a:xfrm>
-            <a:off x="5349240" y="1783080"/>
-            <a:ext cx="6522415" cy="4663440"/>
-          </a:xfrm>
-          <a:prstGeom prst="rect">
-            <a:avLst/>
-          </a:prstGeom>
-          <a:noFill/>
-          <a:ln/>
-        </p:spPr>
-        <p:txBody>
-          <a:bodyPr wrap="square" lIns="0" tIns="0" rIns="0" bIns="0" rtlCol="0" anchor="t"/>
-          <a:lstStyle/>
-          <a:p>
-            <a:pPr algn="l" indent="0" marL="0">
-              <a:spcAft>
-                <a:spcPts val="800"/>
-              </a:spcAft>
-              <a:buNone/>
-            </a:pPr>
-            <a:r>
-              <a:rPr lang="en-US" sz="4000" dirty="0">
-                <a:solidFill>
-                  <a:srgbClr val="111111"/>
-                </a:solidFill>
-                <a:latin typeface="Times New Roman" pitchFamily="34" charset="0"/>
-                <a:ea typeface="Times New Roman" pitchFamily="34" charset="-122"/>
-                <a:cs typeface="Times New Roman" pitchFamily="34" charset="-120"/>
-              </a:rPr>
-              <a:t>In July, the rain belt and the wet south-west wind reach Garoua.</a:t>
-            </a:r>
-            <a:endParaRPr lang="en-US" sz="4000" dirty="0"/>
+              <a:t>Animation: the rain belt moves north in July.</a:t>
+            </a:r>
+            <a:endParaRPr lang="en-US" sz="1800" dirty="0"/>
           </a:p>
         </p:txBody>
       </p:sp>
@@ -10297,7 +10653,7 @@
                 <a:ea typeface="Calibri" pitchFamily="34" charset="-122"/>
                 <a:cs typeface="Calibri" pitchFamily="34" charset="-120"/>
               </a:rPr>
-              <a:t>BOARD SUMMARY</a:t>
+              <a:t>2. PLANETARY WINDS</a:t>
             </a:r>
             <a:endParaRPr lang="en-US" sz="1400" dirty="0"/>
           </a:p>
@@ -10362,7 +10718,7 @@
                 <a:ea typeface="Times New Roman" pitchFamily="34" charset="-122"/>
                 <a:cs typeface="Times New Roman" pitchFamily="34" charset="-120"/>
               </a:rPr>
-              <a:t>Board Summary</a:t>
+              <a:t>Activity 3: Question</a:t>
             </a:r>
             <a:endParaRPr lang="en-US" sz="3600" dirty="0"/>
           </a:p>
@@ -10396,7 +10752,7 @@
               <a:buNone/>
             </a:pPr>
             <a:r>
-              <a:rPr lang="en-US" sz="4000" b="1" dirty="0">
+              <a:rPr lang="en-US" sz="4000" dirty="0">
                 <a:solidFill>
                   <a:srgbClr val="111111"/>
                 </a:solidFill>
@@ -10404,47 +10760,7 @@
                 <a:ea typeface="Times New Roman" pitchFamily="34" charset="-122"/>
                 <a:cs typeface="Times New Roman" pitchFamily="34" charset="-120"/>
               </a:rPr>
-              <a:t>Topic: The Earth-Atmosphere System</a:t>
-            </a:r>
-            <a:endParaRPr lang="en-US" sz="4000" dirty="0"/>
-          </a:p>
-          <a:p>
-            <a:pPr algn="l" indent="0" marL="0">
-              <a:spcAft>
-                <a:spcPts val="800"/>
-              </a:spcAft>
-              <a:buNone/>
-            </a:pPr>
-            <a:r>
-              <a:rPr lang="en-US" sz="4000" b="1" dirty="0">
-                <a:solidFill>
-                  <a:srgbClr val="111111"/>
-                </a:solidFill>
-                <a:latin typeface="Times New Roman" pitchFamily="34" charset="0"/>
-                <a:ea typeface="Times New Roman" pitchFamily="34" charset="-122"/>
-                <a:cs typeface="Times New Roman" pitchFamily="34" charset="-120"/>
-              </a:rPr>
-              <a:t>Sub-topic: Pressure and Winds</a:t>
-            </a:r>
-            <a:endParaRPr lang="en-US" sz="4000" dirty="0"/>
-          </a:p>
-          <a:p>
-            <a:pPr algn="l" indent="0" marL="0">
-              <a:spcAft>
-                <a:spcPts val="800"/>
-              </a:spcAft>
-              <a:buNone/>
-            </a:pPr>
-            <a:r>
-              <a:rPr lang="en-US" sz="4000" b="1" dirty="0">
-                <a:solidFill>
-                  <a:srgbClr val="990011"/>
-                </a:solidFill>
-                <a:latin typeface="Times New Roman" pitchFamily="34" charset="0"/>
-                <a:ea typeface="Times New Roman" pitchFamily="34" charset="-122"/>
-                <a:cs typeface="Times New Roman" pitchFamily="34" charset="-120"/>
-              </a:rPr>
-              <a:t>Lesson 36: Pressure Belts and Planetary Winds</a:t>
+              <a:t>Why does Garoua have rain in July and not in January?</a:t>
             </a:r>
             <a:endParaRPr lang="en-US" sz="4000" dirty="0"/>
           </a:p>
@@ -10556,7 +10872,7 @@
                 <a:ea typeface="Calibri" pitchFamily="34" charset="-122"/>
                 <a:cs typeface="Calibri" pitchFamily="34" charset="-120"/>
               </a:rPr>
-              <a:t>BOARD SUMMARY</a:t>
+              <a:t>2. PLANETARY WINDS</a:t>
             </a:r>
             <a:endParaRPr lang="en-US" sz="1400" dirty="0"/>
           </a:p>
@@ -10579,7 +10895,7 @@
         <p:spPr>
           <a:xfrm>
             <a:off x="0" y="658368"/>
-            <a:ext cx="2468880" cy="5833872"/>
+            <a:ext cx="5120640" cy="5833872"/>
           </a:xfrm>
           <a:prstGeom prst="rect">
             <a:avLst/>
@@ -10594,8 +10910,8 @@
         </p:nvSpPr>
         <p:spPr>
           <a:xfrm>
-            <a:off x="2697480" y="1005840"/>
-            <a:ext cx="9174175" cy="731520"/>
+            <a:off x="5349240" y="1005840"/>
+            <a:ext cx="6522415" cy="731520"/>
           </a:xfrm>
           <a:prstGeom prst="rect">
             <a:avLst/>
@@ -10621,7 +10937,7 @@
                 <a:ea typeface="Times New Roman" pitchFamily="34" charset="-122"/>
                 <a:cs typeface="Times New Roman" pitchFamily="34" charset="-120"/>
               </a:rPr>
-              <a:t>1. Pressure Belts</a:t>
+              <a:t>Activity 3: Answer</a:t>
             </a:r>
             <a:endParaRPr lang="en-US" sz="3600" dirty="0"/>
           </a:p>
@@ -10635,8 +10951,8 @@
         </p:nvSpPr>
         <p:spPr>
           <a:xfrm>
-            <a:off x="2697480" y="1783080"/>
-            <a:ext cx="9174175" cy="4663440"/>
+            <a:off x="5349240" y="1783080"/>
+            <a:ext cx="6522415" cy="4663440"/>
           </a:xfrm>
           <a:prstGeom prst="rect">
             <a:avLst/>
@@ -10655,7 +10971,7 @@
               <a:buNone/>
             </a:pPr>
             <a:r>
-              <a:rPr lang="en-US" sz="4000" i="1" dirty="0">
+              <a:rPr lang="en-US" sz="4000" dirty="0">
                 <a:solidFill>
                   <a:srgbClr val="111111"/>
                 </a:solidFill>
@@ -10663,81 +10979,7 @@
                 <a:ea typeface="Times New Roman" pitchFamily="34" charset="-122"/>
                 <a:cs typeface="Times New Roman" pitchFamily="34" charset="-120"/>
               </a:rPr>
-              <a:t>The major pressure belts are the following:</a:t>
-            </a:r>
-            <a:endParaRPr lang="en-US" sz="4000" dirty="0"/>
-          </a:p>
-          <a:p>
-            <a:pPr algn="l" indent="0" marL="0">
-              <a:spcAft>
-                <a:spcPts val="800"/>
-              </a:spcAft>
-              <a:buNone/>
-            </a:pPr>
-            <a:r>
-              <a:rPr lang="en-US" sz="4000" b="1" dirty="0">
-                <a:solidFill>
-                  <a:srgbClr val="111111"/>
-                </a:solidFill>
-                <a:latin typeface="Times New Roman" pitchFamily="34" charset="0"/>
-                <a:ea typeface="Times New Roman" pitchFamily="34" charset="-122"/>
-                <a:cs typeface="Times New Roman" pitchFamily="34" charset="-120"/>
-              </a:rPr>
-              <a:t>Pressure belt: </a:t>
-            </a:r>
-            <a:pPr algn="l" indent="0" marL="0">
-              <a:spcAft>
-                <a:spcPts val="800"/>
-              </a:spcAft>
-              <a:buNone/>
-            </a:pPr>
-            <a:r>
-              <a:rPr lang="en-US" sz="4000" dirty="0">
-                <a:solidFill>
-                  <a:srgbClr val="111111"/>
-                </a:solidFill>
-                <a:latin typeface="Times New Roman" pitchFamily="34" charset="0"/>
-                <a:ea typeface="Times New Roman" pitchFamily="34" charset="-122"/>
-                <a:cs typeface="Times New Roman" pitchFamily="34" charset="-120"/>
-              </a:rPr>
-              <a:t>It is a zone of high or low pressure around the Earth.</a:t>
-            </a:r>
-            <a:endParaRPr lang="en-US" sz="4000" dirty="0"/>
-          </a:p>
-          <a:p>
-            <a:pPr algn="l" indent="0" marL="0">
-              <a:spcAft>
-                <a:spcPts val="800"/>
-              </a:spcAft>
-              <a:buNone/>
-            </a:pPr>
-            <a:r>
-              <a:rPr lang="en-US" sz="4000" b="1" dirty="0">
-                <a:solidFill>
-                  <a:srgbClr val="111111"/>
-                </a:solidFill>
-                <a:latin typeface="Times New Roman" pitchFamily="34" charset="0"/>
-                <a:ea typeface="Times New Roman" pitchFamily="34" charset="-122"/>
-                <a:cs typeface="Times New Roman" pitchFamily="34" charset="-120"/>
-              </a:rPr>
-              <a:t>Equatorial Low: </a:t>
-            </a:r>
-            <a:pPr algn="l" indent="0" marL="0">
-              <a:spcAft>
-                <a:spcPts val="800"/>
-              </a:spcAft>
-              <a:buNone/>
-            </a:pPr>
-            <a:r>
-              <a:rPr lang="en-US" sz="4000" dirty="0">
-                <a:solidFill>
-                  <a:srgbClr val="111111"/>
-                </a:solidFill>
-                <a:latin typeface="Times New Roman" pitchFamily="34" charset="0"/>
-                <a:ea typeface="Times New Roman" pitchFamily="34" charset="-122"/>
-                <a:cs typeface="Times New Roman" pitchFamily="34" charset="-120"/>
-              </a:rPr>
-              <a:t>Hot air rises at the Equator, giving low pressure and rain (the doldrums).</a:t>
+              <a:t>In July, the rain belt and the moist south-west wind reach Garoua.</a:t>
             </a:r>
             <a:endParaRPr lang="en-US" sz="4000" dirty="0"/>
           </a:p>
@@ -11881,7 +12123,7 @@
         <p:spPr>
           <a:xfrm>
             <a:off x="0" y="658368"/>
-            <a:ext cx="3840480" cy="5833872"/>
+            <a:ext cx="5120640" cy="5833872"/>
           </a:xfrm>
           <a:prstGeom prst="rect">
             <a:avLst/>
@@ -11896,8 +12138,8 @@
         </p:nvSpPr>
         <p:spPr>
           <a:xfrm>
-            <a:off x="4069080" y="1005840"/>
-            <a:ext cx="7802575" cy="731520"/>
+            <a:off x="5349240" y="1005840"/>
+            <a:ext cx="6522415" cy="731520"/>
           </a:xfrm>
           <a:prstGeom prst="rect">
             <a:avLst/>
@@ -11923,7 +12165,7 @@
                 <a:ea typeface="Times New Roman" pitchFamily="34" charset="-122"/>
                 <a:cs typeface="Times New Roman" pitchFamily="34" charset="-120"/>
               </a:rPr>
-              <a:t>1. Pressure Belts (continued)</a:t>
+              <a:t>Board Summary</a:t>
             </a:r>
             <a:endParaRPr lang="en-US" sz="3600" dirty="0"/>
           </a:p>
@@ -11937,8 +12179,8 @@
         </p:nvSpPr>
         <p:spPr>
           <a:xfrm>
-            <a:off x="4069080" y="1783080"/>
-            <a:ext cx="7802575" cy="4663440"/>
+            <a:off x="5349240" y="1783080"/>
+            <a:ext cx="6522415" cy="4663440"/>
           </a:xfrm>
           <a:prstGeom prst="rect">
             <a:avLst/>
@@ -11965,8 +12207,11 @@
                 <a:ea typeface="Times New Roman" pitchFamily="34" charset="-122"/>
                 <a:cs typeface="Times New Roman" pitchFamily="34" charset="-120"/>
               </a:rPr>
-              <a:t>Sub-tropical Highs: </a:t>
-            </a:r>
+              <a:t>Topic: The Earth-Atmosphere System</a:t>
+            </a:r>
+            <a:endParaRPr lang="en-US" sz="4000" dirty="0"/>
+          </a:p>
+          <a:p>
             <a:pPr algn="l" indent="0" marL="0">
               <a:spcAft>
                 <a:spcPts val="800"/>
@@ -11974,7 +12219,7 @@
               <a:buNone/>
             </a:pPr>
             <a:r>
-              <a:rPr lang="en-US" sz="4000" dirty="0">
+              <a:rPr lang="en-US" sz="4000" b="1" dirty="0">
                 <a:solidFill>
                   <a:srgbClr val="111111"/>
                 </a:solidFill>
@@ -11982,7 +12227,7 @@
                 <a:ea typeface="Times New Roman" pitchFamily="34" charset="-122"/>
                 <a:cs typeface="Times New Roman" pitchFamily="34" charset="-120"/>
               </a:rPr>
-              <a:t>Air sinks at about 30° N and S, giving high pressure and deserts.</a:t>
+              <a:t>Sub-topic: Pressure and Winds</a:t>
             </a:r>
             <a:endParaRPr lang="en-US" sz="4000" dirty="0"/>
           </a:p>
@@ -11996,30 +12241,13 @@
             <a:r>
               <a:rPr lang="en-US" sz="4000" b="1" dirty="0">
                 <a:solidFill>
-                  <a:srgbClr val="111111"/>
+                  <a:srgbClr val="990011"/>
                 </a:solidFill>
                 <a:latin typeface="Times New Roman" pitchFamily="34" charset="0"/>
                 <a:ea typeface="Times New Roman" pitchFamily="34" charset="-122"/>
                 <a:cs typeface="Times New Roman" pitchFamily="34" charset="-120"/>
               </a:rPr>
-              <a:t>Temperate Lows and Polar Highs: </a:t>
-            </a:r>
-            <a:pPr algn="l" indent="0" marL="0">
-              <a:spcAft>
-                <a:spcPts val="800"/>
-              </a:spcAft>
-              <a:buNone/>
-            </a:pPr>
-            <a:r>
-              <a:rPr lang="en-US" sz="4000" dirty="0">
-                <a:solidFill>
-                  <a:srgbClr val="111111"/>
-                </a:solidFill>
-                <a:latin typeface="Times New Roman" pitchFamily="34" charset="0"/>
-                <a:ea typeface="Times New Roman" pitchFamily="34" charset="-122"/>
-                <a:cs typeface="Times New Roman" pitchFamily="34" charset="-120"/>
-              </a:rPr>
-              <a:t>Low pressure lies at about 60°, and cold air sinks at the poles to give high pressure.</a:t>
+              <a:t>Lesson 36: Pressure Belts and Planetary Winds</a:t>
             </a:r>
             <a:endParaRPr lang="en-US" sz="4000" dirty="0"/>
           </a:p>
@@ -12137,48 +12365,9 @@
           </a:p>
         </p:txBody>
       </p:sp>
-      <p:sp>
-        <p:nvSpPr>
-          <p:cNvPr id="3" name="Text 1"/>
-          <p:cNvSpPr/>
-          <p:nvPr/>
-        </p:nvSpPr>
-        <p:spPr>
-          <a:xfrm>
-            <a:off x="457200" y="1005840"/>
-            <a:ext cx="11277295" cy="731520"/>
-          </a:xfrm>
-          <a:prstGeom prst="rect">
-            <a:avLst/>
-          </a:prstGeom>
-          <a:noFill/>
-          <a:ln/>
-        </p:spPr>
-        <p:txBody>
-          <a:bodyPr wrap="square" lIns="0" tIns="0" rIns="0" bIns="0" rtlCol="0" anchor="ctr"/>
-          <a:lstStyle/>
-          <a:p>
-            <a:pPr algn="ctr" indent="0" marL="0">
-              <a:buNone/>
-            </a:pPr>
-            <a:r>
-              <a:rPr lang="en-US" sz="3600" b="1" dirty="0">
-                <a:solidFill>
-                  <a:srgbClr val="990011"/>
-                </a:solidFill>
-                <a:latin typeface="Times New Roman" pitchFamily="34" charset="0"/>
-                <a:ea typeface="Times New Roman" pitchFamily="34" charset="-122"/>
-                <a:cs typeface="Times New Roman" pitchFamily="34" charset="-120"/>
-              </a:rPr>
-              <a:t>1. Pressure Belts</a:t>
-            </a:r>
-            <a:endParaRPr lang="en-US" sz="3600" dirty="0"/>
-          </a:p>
-        </p:txBody>
-      </p:sp>
       <p:pic>
         <p:nvPicPr>
-          <p:cNvPr id="4" name="Image 0" descr="/home/claude/f4/img/v2/pressure_belts_big.png">    </p:cNvPr>
+          <p:cNvPr id="3" name="Image 0" descr="/home/claude/f4/img/minesec_sheet.png">    </p:cNvPr>
           <p:cNvPicPr>
             <a:picLocks noChangeAspect="1"/>
           </p:cNvPicPr>
@@ -12192,8 +12381,8 @@
         </p:blipFill>
         <p:spPr>
           <a:xfrm>
-            <a:off x="629930" y="1783080"/>
-            <a:ext cx="10931835" cy="4270248"/>
+            <a:off x="0" y="658368"/>
+            <a:ext cx="1463040" cy="5833872"/>
           </a:xfrm>
           <a:prstGeom prst="rect">
             <a:avLst/>
@@ -12202,14 +12391,14 @@
       </p:pic>
       <p:sp>
         <p:nvSpPr>
-          <p:cNvPr id="5" name="Text 2"/>
+          <p:cNvPr id="4" name="Text 1"/>
           <p:cNvSpPr/>
           <p:nvPr/>
         </p:nvSpPr>
         <p:spPr>
           <a:xfrm>
-            <a:off x="457200" y="6089904"/>
-            <a:ext cx="11277295" cy="347472"/>
+            <a:off x="1691640" y="1005840"/>
+            <a:ext cx="10180015" cy="731520"/>
           </a:xfrm>
           <a:prstGeom prst="rect">
             <a:avLst/>
@@ -12218,24 +12407,142 @@
           <a:ln/>
         </p:spPr>
         <p:txBody>
-          <a:bodyPr wrap="square" lIns="0" tIns="0" rIns="0" bIns="0" rtlCol="0" anchor="ctr"/>
+          <a:bodyPr wrap="square" lIns="0" tIns="0" rIns="0" bIns="0" rtlCol="0" anchor="ctr">
+            <a:normAutofit/>
+          </a:bodyPr>
           <a:lstStyle/>
           <a:p>
             <a:pPr algn="ctr" indent="0" marL="0">
               <a:buNone/>
             </a:pPr>
             <a:r>
-              <a:rPr lang="en-US" sz="1800" i="1" dirty="0">
-                <a:solidFill>
-                  <a:srgbClr val="555555"/>
+              <a:rPr lang="en-US" sz="3600" b="1" dirty="0">
+                <a:solidFill>
+                  <a:srgbClr val="990011"/>
                 </a:solidFill>
                 <a:latin typeface="Times New Roman" pitchFamily="34" charset="0"/>
                 <a:ea typeface="Times New Roman" pitchFamily="34" charset="-122"/>
                 <a:cs typeface="Times New Roman" pitchFamily="34" charset="-120"/>
               </a:rPr>
-              <a:t>Illustration: pressure belts and planetary winds</a:t>
-            </a:r>
-            <a:endParaRPr lang="en-US" sz="1800" dirty="0"/>
+              <a:t>DEFINITIONS</a:t>
+            </a:r>
+            <a:endParaRPr lang="en-US" sz="3600" dirty="0"/>
+          </a:p>
+        </p:txBody>
+      </p:sp>
+      <p:sp>
+        <p:nvSpPr>
+          <p:cNvPr id="5" name="Text 2"/>
+          <p:cNvSpPr/>
+          <p:nvPr/>
+        </p:nvSpPr>
+        <p:spPr>
+          <a:xfrm>
+            <a:off x="1691640" y="1783080"/>
+            <a:ext cx="10180015" cy="4663440"/>
+          </a:xfrm>
+          <a:prstGeom prst="rect">
+            <a:avLst/>
+          </a:prstGeom>
+          <a:noFill/>
+          <a:ln/>
+        </p:spPr>
+        <p:txBody>
+          <a:bodyPr wrap="square" lIns="0" tIns="0" rIns="0" bIns="0" rtlCol="0" anchor="t"/>
+          <a:lstStyle/>
+          <a:p>
+            <a:pPr algn="l" indent="0" marL="0">
+              <a:spcAft>
+                <a:spcPts val="800"/>
+              </a:spcAft>
+              <a:buNone/>
+            </a:pPr>
+            <a:r>
+              <a:rPr lang="en-US" sz="4000" i="1" dirty="0">
+                <a:solidFill>
+                  <a:srgbClr val="111111"/>
+                </a:solidFill>
+                <a:latin typeface="Times New Roman" pitchFamily="34" charset="0"/>
+                <a:ea typeface="Times New Roman" pitchFamily="34" charset="-122"/>
+                <a:cs typeface="Times New Roman" pitchFamily="34" charset="-120"/>
+              </a:rPr>
+              <a:t>The key terms of this lesson are defined as follows:</a:t>
+            </a:r>
+            <a:endParaRPr lang="en-US" sz="4000" dirty="0"/>
+          </a:p>
+          <a:p>
+            <a:pPr algn="l" indent="0" marL="0">
+              <a:spcAft>
+                <a:spcPts val="800"/>
+              </a:spcAft>
+              <a:buNone/>
+            </a:pPr>
+            <a:r>
+              <a:rPr lang="en-US" sz="4000" b="1" dirty="0">
+                <a:solidFill>
+                  <a:srgbClr val="111111"/>
+                </a:solidFill>
+                <a:latin typeface="Times New Roman" pitchFamily="34" charset="0"/>
+                <a:ea typeface="Times New Roman" pitchFamily="34" charset="-122"/>
+                <a:cs typeface="Times New Roman" pitchFamily="34" charset="-120"/>
+              </a:rPr>
+              <a:t>Pressure belt: </a:t>
+            </a:r>
+            <a:pPr algn="l" indent="0" marL="0">
+              <a:spcAft>
+                <a:spcPts val="800"/>
+              </a:spcAft>
+              <a:buNone/>
+            </a:pPr>
+            <a:r>
+              <a:rPr lang="en-US" sz="4000" dirty="0">
+                <a:solidFill>
+                  <a:srgbClr val="111111"/>
+                </a:solidFill>
+                <a:latin typeface="Times New Roman" pitchFamily="34" charset="0"/>
+                <a:ea typeface="Times New Roman" pitchFamily="34" charset="-122"/>
+                <a:cs typeface="Times New Roman" pitchFamily="34" charset="-120"/>
+              </a:rPr>
+              <a:t>It is a zone of high or low pressure that goes around the Earth.</a:t>
+            </a:r>
+            <a:endParaRPr lang="en-US" sz="4000" dirty="0"/>
+          </a:p>
+          <a:p>
+            <a:pPr algn="l" indent="0" marL="0">
+              <a:spcAft>
+                <a:spcPts val="800"/>
+              </a:spcAft>
+              <a:buNone/>
+            </a:pPr>
+            <a:r>
+              <a:rPr lang="en-US" sz="4000" b="1" dirty="0">
+                <a:solidFill>
+                  <a:srgbClr val="111111"/>
+                </a:solidFill>
+                <a:latin typeface="Times New Roman" pitchFamily="34" charset="0"/>
+                <a:ea typeface="Times New Roman" pitchFamily="34" charset="-122"/>
+                <a:cs typeface="Times New Roman" pitchFamily="34" charset="-120"/>
+              </a:rPr>
+              <a:t>Planetary winds: </a:t>
+            </a:r>
+            <a:pPr algn="l" indent="0" marL="0">
+              <a:spcAft>
+                <a:spcPts val="800"/>
+              </a:spcAft>
+              <a:buNone/>
+            </a:pPr>
+            <a:r>
+              <a:rPr lang="en-US" sz="4000" dirty="0">
+                <a:solidFill>
+                  <a:srgbClr val="111111"/>
+                </a:solidFill>
+                <a:latin typeface="Times New Roman" pitchFamily="34" charset="0"/>
+                <a:ea typeface="Times New Roman" pitchFamily="34" charset="-122"/>
+                <a:cs typeface="Times New Roman" pitchFamily="34" charset="-120"/>
+              </a:rPr>
+              <a:t>They are the large, permanent winds that blow from high-pressure belts to low-pressure belts.</a:t>
+            </a:r>
+            <a:endParaRPr lang="en-US" sz="4000" dirty="0"/>
           </a:p>
         </p:txBody>
       </p:sp>
@@ -12351,9 +12658,129 @@
           </a:p>
         </p:txBody>
       </p:sp>
+      <p:sp>
+        <p:nvSpPr>
+          <p:cNvPr id="3" name="Text 1"/>
+          <p:cNvSpPr/>
+          <p:nvPr/>
+        </p:nvSpPr>
+        <p:spPr>
+          <a:xfrm>
+            <a:off x="365760" y="1005840"/>
+            <a:ext cx="11460175" cy="731520"/>
+          </a:xfrm>
+          <a:prstGeom prst="rect">
+            <a:avLst/>
+          </a:prstGeom>
+          <a:noFill/>
+          <a:ln/>
+        </p:spPr>
+        <p:txBody>
+          <a:bodyPr wrap="square" lIns="0" tIns="0" rIns="0" bIns="0" rtlCol="0" anchor="ctr">
+            <a:normAutofit/>
+          </a:bodyPr>
+          <a:lstStyle/>
+          <a:p>
+            <a:pPr algn="ctr" indent="0" marL="0">
+              <a:buNone/>
+            </a:pPr>
+            <a:r>
+              <a:rPr lang="en-US" sz="3600" b="1" dirty="0">
+                <a:solidFill>
+                  <a:srgbClr val="990011"/>
+                </a:solidFill>
+                <a:latin typeface="Times New Roman" pitchFamily="34" charset="0"/>
+                <a:ea typeface="Times New Roman" pitchFamily="34" charset="-122"/>
+                <a:cs typeface="Times New Roman" pitchFamily="34" charset="-120"/>
+              </a:rPr>
+              <a:t>1. Meaning of Pressure Belts: Major Types</a:t>
+            </a:r>
+            <a:endParaRPr lang="en-US" sz="3600" dirty="0"/>
+          </a:p>
+        </p:txBody>
+      </p:sp>
+      <p:sp>
+        <p:nvSpPr>
+          <p:cNvPr id="4" name="Text 2"/>
+          <p:cNvSpPr/>
+          <p:nvPr/>
+        </p:nvSpPr>
+        <p:spPr>
+          <a:xfrm>
+            <a:off x="365760" y="1783080"/>
+            <a:ext cx="4846320" cy="4617720"/>
+          </a:xfrm>
+          <a:prstGeom prst="rect">
+            <a:avLst/>
+          </a:prstGeom>
+          <a:noFill/>
+          <a:ln/>
+        </p:spPr>
+        <p:txBody>
+          <a:bodyPr wrap="square" lIns="0" tIns="0" rIns="0" bIns="0" rtlCol="0" anchor="t"/>
+          <a:lstStyle/>
+          <a:p>
+            <a:pPr algn="l" indent="0" marL="0">
+              <a:spcAft>
+                <a:spcPts val="800"/>
+              </a:spcAft>
+              <a:buNone/>
+            </a:pPr>
+            <a:r>
+              <a:rPr lang="en-US" sz="3400" i="1" dirty="0">
+                <a:solidFill>
+                  <a:srgbClr val="111111"/>
+                </a:solidFill>
+                <a:latin typeface="Times New Roman" pitchFamily="34" charset="0"/>
+                <a:ea typeface="Times New Roman" pitchFamily="34" charset="-122"/>
+                <a:cs typeface="Times New Roman" pitchFamily="34" charset="-120"/>
+              </a:rPr>
+              <a:t>The major pressure belts are the following:</a:t>
+            </a:r>
+            <a:endParaRPr lang="en-US" sz="3400" dirty="0"/>
+          </a:p>
+          <a:p>
+            <a:pPr algn="l" indent="0" marL="0">
+              <a:spcAft>
+                <a:spcPts val="800"/>
+              </a:spcAft>
+              <a:buNone/>
+            </a:pPr>
+            <a:r>
+              <a:rPr lang="en-US" sz="3400" b="1" dirty="0">
+                <a:solidFill>
+                  <a:srgbClr val="111111"/>
+                </a:solidFill>
+                <a:latin typeface="Times New Roman" pitchFamily="34" charset="0"/>
+                <a:ea typeface="Times New Roman" pitchFamily="34" charset="-122"/>
+                <a:cs typeface="Times New Roman" pitchFamily="34" charset="-120"/>
+              </a:rPr>
+              <a:t>Equatorial Low (0°): </a:t>
+            </a:r>
+            <a:pPr algn="l" indent="0" marL="0">
+              <a:spcAft>
+                <a:spcPts val="800"/>
+              </a:spcAft>
+              <a:buNone/>
+            </a:pPr>
+            <a:r>
+              <a:rPr lang="en-US" sz="3400" dirty="0">
+                <a:solidFill>
+                  <a:srgbClr val="111111"/>
+                </a:solidFill>
+                <a:latin typeface="Times New Roman" pitchFamily="34" charset="0"/>
+                <a:ea typeface="Times New Roman" pitchFamily="34" charset="-122"/>
+                <a:cs typeface="Times New Roman" pitchFamily="34" charset="-120"/>
+              </a:rPr>
+              <a:t>Hot air rises at the Equator, giving low pressure, calm winds (the doldrums) and heavy rain.</a:t>
+            </a:r>
+            <a:endParaRPr lang="en-US" sz="3400" dirty="0"/>
+          </a:p>
+        </p:txBody>
+      </p:sp>
       <p:pic>
         <p:nvPicPr>
-          <p:cNvPr id="3" name="Image 0" descr="/home/claude/f4/img/minesec_sheet.png">    </p:cNvPr>
+          <p:cNvPr id="5" name="Image 0" descr="/home/claude/f4/img/v2/pressure_belts_big.png">    </p:cNvPr>
           <p:cNvPicPr>
             <a:picLocks noChangeAspect="1"/>
           </p:cNvPicPr>
@@ -12367,8 +12794,8 @@
         </p:blipFill>
         <p:spPr>
           <a:xfrm>
-            <a:off x="0" y="658368"/>
-            <a:ext cx="2468880" cy="5833872"/>
+            <a:off x="5349240" y="2617506"/>
+            <a:ext cx="6659575" cy="2601397"/>
           </a:xfrm>
           <a:prstGeom prst="rect">
             <a:avLst/>
@@ -12377,14 +12804,14 @@
       </p:pic>
       <p:sp>
         <p:nvSpPr>
-          <p:cNvPr id="4" name="Text 1"/>
+          <p:cNvPr id="6" name="Text 3"/>
           <p:cNvSpPr/>
           <p:nvPr/>
         </p:nvSpPr>
         <p:spPr>
           <a:xfrm>
-            <a:off x="2697480" y="1005840"/>
-            <a:ext cx="9174175" cy="731520"/>
+            <a:off x="5349240" y="6089904"/>
+            <a:ext cx="6659575" cy="347472"/>
           </a:xfrm>
           <a:prstGeom prst="rect">
             <a:avLst/>
@@ -12393,142 +12820,24 @@
           <a:ln/>
         </p:spPr>
         <p:txBody>
-          <a:bodyPr wrap="square" lIns="0" tIns="0" rIns="0" bIns="0" rtlCol="0" anchor="ctr">
-            <a:normAutofit/>
-          </a:bodyPr>
+          <a:bodyPr wrap="square" lIns="0" tIns="0" rIns="0" bIns="0" rtlCol="0" anchor="ctr"/>
           <a:lstStyle/>
           <a:p>
             <a:pPr algn="ctr" indent="0" marL="0">
               <a:buNone/>
             </a:pPr>
             <a:r>
-              <a:rPr lang="en-US" sz="3600" b="1" dirty="0">
-                <a:solidFill>
-                  <a:srgbClr val="990011"/>
+              <a:rPr lang="en-US" sz="1600" i="1" dirty="0">
+                <a:solidFill>
+                  <a:srgbClr val="555555"/>
                 </a:solidFill>
                 <a:latin typeface="Times New Roman" pitchFamily="34" charset="0"/>
                 <a:ea typeface="Times New Roman" pitchFamily="34" charset="-122"/>
                 <a:cs typeface="Times New Roman" pitchFamily="34" charset="-120"/>
               </a:rPr>
-              <a:t>2. Planetary Winds</a:t>
-            </a:r>
-            <a:endParaRPr lang="en-US" sz="3600" dirty="0"/>
-          </a:p>
-        </p:txBody>
-      </p:sp>
-      <p:sp>
-        <p:nvSpPr>
-          <p:cNvPr id="5" name="Text 2"/>
-          <p:cNvSpPr/>
-          <p:nvPr/>
-        </p:nvSpPr>
-        <p:spPr>
-          <a:xfrm>
-            <a:off x="2697480" y="1783080"/>
-            <a:ext cx="9174175" cy="4663440"/>
-          </a:xfrm>
-          <a:prstGeom prst="rect">
-            <a:avLst/>
-          </a:prstGeom>
-          <a:noFill/>
-          <a:ln/>
-        </p:spPr>
-        <p:txBody>
-          <a:bodyPr wrap="square" lIns="0" tIns="0" rIns="0" bIns="0" rtlCol="0" anchor="t"/>
-          <a:lstStyle/>
-          <a:p>
-            <a:pPr algn="l" indent="0" marL="0">
-              <a:spcAft>
-                <a:spcPts val="800"/>
-              </a:spcAft>
-              <a:buNone/>
-            </a:pPr>
-            <a:r>
-              <a:rPr lang="en-US" sz="4000" i="1" dirty="0">
-                <a:solidFill>
-                  <a:srgbClr val="111111"/>
-                </a:solidFill>
-                <a:latin typeface="Times New Roman" pitchFamily="34" charset="0"/>
-                <a:ea typeface="Times New Roman" pitchFamily="34" charset="-122"/>
-                <a:cs typeface="Times New Roman" pitchFamily="34" charset="-120"/>
-              </a:rPr>
-              <a:t>The planetary winds blow between the pressure belts as follows:</a:t>
-            </a:r>
-            <a:endParaRPr lang="en-US" sz="4000" dirty="0"/>
-          </a:p>
-          <a:p>
-            <a:pPr algn="l" indent="0" marL="0">
-              <a:spcAft>
-                <a:spcPts val="800"/>
-              </a:spcAft>
-              <a:buNone/>
-            </a:pPr>
-            <a:r>
-              <a:rPr lang="en-US" sz="4000" b="1" dirty="0">
-                <a:solidFill>
-                  <a:srgbClr val="111111"/>
-                </a:solidFill>
-                <a:latin typeface="Times New Roman" pitchFamily="34" charset="0"/>
-                <a:ea typeface="Times New Roman" pitchFamily="34" charset="-122"/>
-                <a:cs typeface="Times New Roman" pitchFamily="34" charset="-120"/>
-              </a:rPr>
-              <a:t>Trade winds: </a:t>
-            </a:r>
-            <a:pPr algn="l" indent="0" marL="0">
-              <a:spcAft>
-                <a:spcPts val="800"/>
-              </a:spcAft>
-              <a:buNone/>
-            </a:pPr>
-            <a:r>
-              <a:rPr lang="en-US" sz="4000" dirty="0">
-                <a:solidFill>
-                  <a:srgbClr val="111111"/>
-                </a:solidFill>
-                <a:latin typeface="Times New Roman" pitchFamily="34" charset="0"/>
-                <a:ea typeface="Times New Roman" pitchFamily="34" charset="-122"/>
-                <a:cs typeface="Times New Roman" pitchFamily="34" charset="-120"/>
-              </a:rPr>
-              <a:t>They blow from the sub-tropical highs towards the Equator.</a:t>
-            </a:r>
-            <a:endParaRPr lang="en-US" sz="4000" dirty="0"/>
-          </a:p>
-          <a:p>
-            <a:pPr algn="l" indent="0" marL="0">
-              <a:spcAft>
-                <a:spcPts val="800"/>
-              </a:spcAft>
-              <a:buNone/>
-            </a:pPr>
-            <a:r>
-              <a:rPr lang="en-US" sz="4000" b="1" dirty="0">
-                <a:solidFill>
-                  <a:srgbClr val="111111"/>
-                </a:solidFill>
-                <a:latin typeface="Times New Roman" pitchFamily="34" charset="0"/>
-                <a:ea typeface="Times New Roman" pitchFamily="34" charset="-122"/>
-                <a:cs typeface="Times New Roman" pitchFamily="34" charset="-120"/>
-              </a:rPr>
-              <a:t>Westerlies: </a:t>
-            </a:r>
-            <a:pPr algn="l" indent="0" marL="0">
-              <a:spcAft>
-                <a:spcPts val="800"/>
-              </a:spcAft>
-              <a:buNone/>
-            </a:pPr>
-            <a:r>
-              <a:rPr lang="en-US" sz="4000" dirty="0">
-                <a:solidFill>
-                  <a:srgbClr val="111111"/>
-                </a:solidFill>
-                <a:latin typeface="Times New Roman" pitchFamily="34" charset="0"/>
-                <a:ea typeface="Times New Roman" pitchFamily="34" charset="-122"/>
-                <a:cs typeface="Times New Roman" pitchFamily="34" charset="-120"/>
-              </a:rPr>
-              <a:t>They blow from the sub-tropical highs towards the temperate lows.</a:t>
-            </a:r>
-            <a:endParaRPr lang="en-US" sz="4000" dirty="0"/>
+              <a:t>Illustration: pressure belts</a:t>
+            </a:r>
+            <a:endParaRPr lang="en-US" sz="1600" dirty="0"/>
           </a:p>
         </p:txBody>
       </p:sp>
@@ -12661,7 +12970,7 @@
         <p:spPr>
           <a:xfrm>
             <a:off x="0" y="658368"/>
-            <a:ext cx="5120640" cy="5833872"/>
+            <a:ext cx="2468880" cy="5833872"/>
           </a:xfrm>
           <a:prstGeom prst="rect">
             <a:avLst/>
@@ -12676,8 +12985,8 @@
         </p:nvSpPr>
         <p:spPr>
           <a:xfrm>
-            <a:off x="5349240" y="1005840"/>
-            <a:ext cx="6522415" cy="731520"/>
+            <a:off x="2697480" y="1005840"/>
+            <a:ext cx="9174175" cy="731520"/>
           </a:xfrm>
           <a:prstGeom prst="rect">
             <a:avLst/>
@@ -12703,7 +13012,7 @@
                 <a:ea typeface="Times New Roman" pitchFamily="34" charset="-122"/>
                 <a:cs typeface="Times New Roman" pitchFamily="34" charset="-120"/>
               </a:rPr>
-              <a:t>2. Planetary Winds (continued)</a:t>
+              <a:t>1. Meaning of Pressure Belts: Major Types</a:t>
             </a:r>
             <a:endParaRPr lang="en-US" sz="3600" dirty="0"/>
           </a:p>
@@ -12717,8 +13026,8 @@
         </p:nvSpPr>
         <p:spPr>
           <a:xfrm>
-            <a:off x="5349240" y="1783080"/>
-            <a:ext cx="6522415" cy="4663440"/>
+            <a:off x="2697480" y="1783080"/>
+            <a:ext cx="9174175" cy="4663440"/>
           </a:xfrm>
           <a:prstGeom prst="rect">
             <a:avLst/>
@@ -12745,7 +13054,7 @@
                 <a:ea typeface="Times New Roman" pitchFamily="34" charset="-122"/>
                 <a:cs typeface="Times New Roman" pitchFamily="34" charset="-120"/>
               </a:rPr>
-              <a:t>Polar easterlies: </a:t>
+              <a:t>Sub-tropical Highs (about 30° N and S): </a:t>
             </a:r>
             <a:pPr algn="l" indent="0" marL="0">
               <a:spcAft>
@@ -12762,7 +13071,7 @@
                 <a:ea typeface="Times New Roman" pitchFamily="34" charset="-122"/>
                 <a:cs typeface="Times New Roman" pitchFamily="34" charset="-120"/>
               </a:rPr>
-              <a:t>They blow from the polar highs towards the temperate lows.</a:t>
+              <a:t>Air sinks, giving high pressure, dry weather and hot deserts.</a:t>
             </a:r>
             <a:endParaRPr lang="en-US" sz="4000" dirty="0"/>
           </a:p>
@@ -12782,7 +13091,7 @@
                 <a:ea typeface="Times New Roman" pitchFamily="34" charset="-122"/>
                 <a:cs typeface="Times New Roman" pitchFamily="34" charset="-120"/>
               </a:rPr>
-              <a:t>Garoua: </a:t>
+              <a:t>Temperate Lows (about 60° N and S): </a:t>
             </a:r>
             <a:pPr algn="l" indent="0" marL="0">
               <a:spcAft>
@@ -12799,7 +13108,7 @@
                 <a:ea typeface="Times New Roman" pitchFamily="34" charset="-122"/>
                 <a:cs typeface="Times New Roman" pitchFamily="34" charset="-120"/>
               </a:rPr>
-              <a:t>The moist south-west monsoon blows in July, and the dry Harmattan blows in January.</a:t>
+              <a:t>Warm and cold air meet and rise, giving low pressure and rain.</a:t>
             </a:r>
             <a:endParaRPr lang="en-US" sz="4000" dirty="0"/>
           </a:p>
@@ -12911,7 +13220,7 @@
                 <a:ea typeface="Calibri" pitchFamily="34" charset="-122"/>
                 <a:cs typeface="Calibri" pitchFamily="34" charset="-120"/>
               </a:rPr>
-              <a:t>FORMATIVE EVALUATION</a:t>
+              <a:t>BOARD SUMMARY</a:t>
             </a:r>
             <a:endParaRPr lang="en-US" sz="1400" dirty="0"/>
           </a:p>
@@ -12976,7 +13285,7 @@
                 <a:ea typeface="Times New Roman" pitchFamily="34" charset="-122"/>
                 <a:cs typeface="Times New Roman" pitchFamily="34" charset="-120"/>
               </a:rPr>
-              <a:t>Evaluation 1</a:t>
+              <a:t>1. Meaning of Pressure Belts: Major Types (continued)</a:t>
             </a:r>
             <a:endParaRPr lang="en-US" sz="3600" dirty="0"/>
           </a:p>
@@ -13010,7 +13319,7 @@
               <a:buNone/>
             </a:pPr>
             <a:r>
-              <a:rPr lang="en-US" sz="4000" dirty="0">
+              <a:rPr lang="en-US" sz="4000" b="1" dirty="0">
                 <a:solidFill>
                   <a:srgbClr val="111111"/>
                 </a:solidFill>
@@ -13018,7 +13327,24 @@
                 <a:ea typeface="Times New Roman" pitchFamily="34" charset="-122"/>
                 <a:cs typeface="Times New Roman" pitchFamily="34" charset="-120"/>
               </a:rPr>
-              <a:t>Where is the Equatorial Low?</a:t>
+              <a:t>Polar Highs (90° N and S): </a:t>
+            </a:r>
+            <a:pPr algn="l" indent="0" marL="0">
+              <a:spcAft>
+                <a:spcPts val="800"/>
+              </a:spcAft>
+              <a:buNone/>
+            </a:pPr>
+            <a:r>
+              <a:rPr lang="en-US" sz="4000" dirty="0">
+                <a:solidFill>
+                  <a:srgbClr val="111111"/>
+                </a:solidFill>
+                <a:latin typeface="Times New Roman" pitchFamily="34" charset="0"/>
+                <a:ea typeface="Times New Roman" pitchFamily="34" charset="-122"/>
+                <a:cs typeface="Times New Roman" pitchFamily="34" charset="-120"/>
+              </a:rPr>
+              <a:t>Very cold, heavy air sinks at the poles, giving high pressure.</a:t>
             </a:r>
             <a:endParaRPr lang="en-US" sz="4000" dirty="0"/>
           </a:p>
@@ -13130,15 +13456,135 @@
                 <a:ea typeface="Calibri" pitchFamily="34" charset="-122"/>
                 <a:cs typeface="Calibri" pitchFamily="34" charset="-120"/>
               </a:rPr>
-              <a:t>FORMATIVE EVALUATION</a:t>
+              <a:t>BOARD SUMMARY</a:t>
             </a:r>
             <a:endParaRPr lang="en-US" sz="1400" dirty="0"/>
+          </a:p>
+        </p:txBody>
+      </p:sp>
+      <p:sp>
+        <p:nvSpPr>
+          <p:cNvPr id="3" name="Text 1"/>
+          <p:cNvSpPr/>
+          <p:nvPr/>
+        </p:nvSpPr>
+        <p:spPr>
+          <a:xfrm>
+            <a:off x="365760" y="1005840"/>
+            <a:ext cx="11460175" cy="731520"/>
+          </a:xfrm>
+          <a:prstGeom prst="rect">
+            <a:avLst/>
+          </a:prstGeom>
+          <a:noFill/>
+          <a:ln/>
+        </p:spPr>
+        <p:txBody>
+          <a:bodyPr wrap="square" lIns="0" tIns="0" rIns="0" bIns="0" rtlCol="0" anchor="ctr">
+            <a:normAutofit/>
+          </a:bodyPr>
+          <a:lstStyle/>
+          <a:p>
+            <a:pPr algn="ctr" indent="0" marL="0">
+              <a:buNone/>
+            </a:pPr>
+            <a:r>
+              <a:rPr lang="en-US" sz="3600" b="1" dirty="0">
+                <a:solidFill>
+                  <a:srgbClr val="990011"/>
+                </a:solidFill>
+                <a:latin typeface="Times New Roman" pitchFamily="34" charset="0"/>
+                <a:ea typeface="Times New Roman" pitchFamily="34" charset="-122"/>
+                <a:cs typeface="Times New Roman" pitchFamily="34" charset="-120"/>
+              </a:rPr>
+              <a:t>2. Illustration of Pressure Belts and Planetary Winds</a:t>
+            </a:r>
+            <a:endParaRPr lang="en-US" sz="3600" dirty="0"/>
+          </a:p>
+        </p:txBody>
+      </p:sp>
+      <p:sp>
+        <p:nvSpPr>
+          <p:cNvPr id="4" name="Text 2"/>
+          <p:cNvSpPr/>
+          <p:nvPr/>
+        </p:nvSpPr>
+        <p:spPr>
+          <a:xfrm>
+            <a:off x="365760" y="1783080"/>
+            <a:ext cx="4846320" cy="4617720"/>
+          </a:xfrm>
+          <a:prstGeom prst="rect">
+            <a:avLst/>
+          </a:prstGeom>
+          <a:noFill/>
+          <a:ln/>
+        </p:spPr>
+        <p:txBody>
+          <a:bodyPr wrap="square" lIns="0" tIns="0" rIns="0" bIns="0" rtlCol="0" anchor="t"/>
+          <a:lstStyle/>
+          <a:p>
+            <a:pPr algn="l" indent="0" marL="0">
+              <a:spcAft>
+                <a:spcPts val="800"/>
+              </a:spcAft>
+              <a:buNone/>
+            </a:pPr>
+            <a:r>
+              <a:rPr lang="en-US" sz="3200" i="1" dirty="0">
+                <a:solidFill>
+                  <a:srgbClr val="111111"/>
+                </a:solidFill>
+                <a:latin typeface="Times New Roman" pitchFamily="34" charset="0"/>
+                <a:ea typeface="Times New Roman" pitchFamily="34" charset="-122"/>
+                <a:cs typeface="Times New Roman" pitchFamily="34" charset="-120"/>
+              </a:rPr>
+              <a:t>The planetary winds blow between the pressure belts as follows:</a:t>
+            </a:r>
+            <a:endParaRPr lang="en-US" sz="3200" dirty="0"/>
+          </a:p>
+          <a:p>
+            <a:pPr algn="l" indent="0" marL="0">
+              <a:spcAft>
+                <a:spcPts val="800"/>
+              </a:spcAft>
+              <a:buNone/>
+            </a:pPr>
+            <a:r>
+              <a:rPr lang="en-US" sz="3200" b="1" dirty="0">
+                <a:solidFill>
+                  <a:srgbClr val="111111"/>
+                </a:solidFill>
+                <a:latin typeface="Times New Roman" pitchFamily="34" charset="0"/>
+                <a:ea typeface="Times New Roman" pitchFamily="34" charset="-122"/>
+                <a:cs typeface="Times New Roman" pitchFamily="34" charset="-120"/>
+              </a:rPr>
+              <a:t>Trade winds: </a:t>
+            </a:r>
+            <a:pPr algn="l" indent="0" marL="0">
+              <a:spcAft>
+                <a:spcPts val="800"/>
+              </a:spcAft>
+              <a:buNone/>
+            </a:pPr>
+            <a:r>
+              <a:rPr lang="en-US" sz="3200" dirty="0">
+                <a:solidFill>
+                  <a:srgbClr val="111111"/>
+                </a:solidFill>
+                <a:latin typeface="Times New Roman" pitchFamily="34" charset="0"/>
+                <a:ea typeface="Times New Roman" pitchFamily="34" charset="-122"/>
+                <a:cs typeface="Times New Roman" pitchFamily="34" charset="-120"/>
+              </a:rPr>
+              <a:t>They blow from the sub-tropical highs towards the Equator: north-east trades in the north and south-east trades in the south.</a:t>
+            </a:r>
+            <a:endParaRPr lang="en-US" sz="3200" dirty="0"/>
           </a:p>
         </p:txBody>
       </p:sp>
       <p:pic>
         <p:nvPicPr>
-          <p:cNvPr id="3" name="Image 0" descr="/home/claude/f4/img/minesec_sheet.png">    </p:cNvPr>
+          <p:cNvPr id="5" name="Image 0" descr="/home/claude/f4/img/v2/planetary_winds_big.png">    </p:cNvPr>
           <p:cNvPicPr>
             <a:picLocks noChangeAspect="1"/>
           </p:cNvPicPr>
@@ -13152,8 +13598,8 @@
         </p:blipFill>
         <p:spPr>
           <a:xfrm>
-            <a:off x="0" y="658368"/>
-            <a:ext cx="5120640" cy="5833872"/>
+            <a:off x="5349240" y="2617506"/>
+            <a:ext cx="6659575" cy="2601397"/>
           </a:xfrm>
           <a:prstGeom prst="rect">
             <a:avLst/>
@@ -13162,14 +13608,14 @@
       </p:pic>
       <p:sp>
         <p:nvSpPr>
-          <p:cNvPr id="4" name="Text 1"/>
+          <p:cNvPr id="6" name="Text 3"/>
           <p:cNvSpPr/>
           <p:nvPr/>
         </p:nvSpPr>
         <p:spPr>
           <a:xfrm>
-            <a:off x="5349240" y="1005840"/>
-            <a:ext cx="6522415" cy="731520"/>
+            <a:off x="5349240" y="6089904"/>
+            <a:ext cx="6659575" cy="347472"/>
           </a:xfrm>
           <a:prstGeom prst="rect">
             <a:avLst/>
@@ -13178,68 +13624,24 @@
           <a:ln/>
         </p:spPr>
         <p:txBody>
-          <a:bodyPr wrap="square" lIns="0" tIns="0" rIns="0" bIns="0" rtlCol="0" anchor="ctr">
-            <a:normAutofit/>
-          </a:bodyPr>
+          <a:bodyPr wrap="square" lIns="0" tIns="0" rIns="0" bIns="0" rtlCol="0" anchor="ctr"/>
           <a:lstStyle/>
           <a:p>
             <a:pPr algn="ctr" indent="0" marL="0">
               <a:buNone/>
             </a:pPr>
             <a:r>
-              <a:rPr lang="en-US" sz="3600" b="1" dirty="0">
-                <a:solidFill>
-                  <a:srgbClr val="990011"/>
+              <a:rPr lang="en-US" sz="1600" i="1" dirty="0">
+                <a:solidFill>
+                  <a:srgbClr val="555555"/>
                 </a:solidFill>
                 <a:latin typeface="Times New Roman" pitchFamily="34" charset="0"/>
                 <a:ea typeface="Times New Roman" pitchFamily="34" charset="-122"/>
                 <a:cs typeface="Times New Roman" pitchFamily="34" charset="-120"/>
               </a:rPr>
-              <a:t>Expected Answer</a:t>
-            </a:r>
-            <a:endParaRPr lang="en-US" sz="3600" dirty="0"/>
-          </a:p>
-        </p:txBody>
-      </p:sp>
-      <p:sp>
-        <p:nvSpPr>
-          <p:cNvPr id="5" name="Text 2"/>
-          <p:cNvSpPr/>
-          <p:nvPr/>
-        </p:nvSpPr>
-        <p:spPr>
-          <a:xfrm>
-            <a:off x="5349240" y="1783080"/>
-            <a:ext cx="6522415" cy="4663440"/>
-          </a:xfrm>
-          <a:prstGeom prst="rect">
-            <a:avLst/>
-          </a:prstGeom>
-          <a:noFill/>
-          <a:ln/>
-        </p:spPr>
-        <p:txBody>
-          <a:bodyPr wrap="square" lIns="0" tIns="0" rIns="0" bIns="0" rtlCol="0" anchor="t"/>
-          <a:lstStyle/>
-          <a:p>
-            <a:pPr algn="l" indent="0" marL="0">
-              <a:spcAft>
-                <a:spcPts val="800"/>
-              </a:spcAft>
-              <a:buNone/>
-            </a:pPr>
-            <a:r>
-              <a:rPr lang="en-US" sz="4000" dirty="0">
-                <a:solidFill>
-                  <a:srgbClr val="111111"/>
-                </a:solidFill>
-                <a:latin typeface="Times New Roman" pitchFamily="34" charset="0"/>
-                <a:ea typeface="Times New Roman" pitchFamily="34" charset="-122"/>
-                <a:cs typeface="Times New Roman" pitchFamily="34" charset="-120"/>
-              </a:rPr>
-              <a:t>At the Equator (0°).</a:t>
-            </a:r>
-            <a:endParaRPr lang="en-US" sz="4000" dirty="0"/>
+              <a:t>Illustration: planetary winds</a:t>
+            </a:r>
+            <a:endParaRPr lang="en-US" sz="1600" dirty="0"/>
           </a:p>
         </p:txBody>
       </p:sp>
@@ -13349,7 +13751,7 @@
                 <a:ea typeface="Calibri" pitchFamily="34" charset="-122"/>
                 <a:cs typeface="Calibri" pitchFamily="34" charset="-120"/>
               </a:rPr>
-              <a:t>FORMATIVE EVALUATION</a:t>
+              <a:t>BOARD SUMMARY</a:t>
             </a:r>
             <a:endParaRPr lang="en-US" sz="1400" dirty="0"/>
           </a:p>
@@ -13372,7 +13774,7 @@
         <p:spPr>
           <a:xfrm>
             <a:off x="0" y="658368"/>
-            <a:ext cx="5120640" cy="5833872"/>
+            <a:ext cx="1463040" cy="5833872"/>
           </a:xfrm>
           <a:prstGeom prst="rect">
             <a:avLst/>
@@ -13387,8 +13789,8 @@
         </p:nvSpPr>
         <p:spPr>
           <a:xfrm>
-            <a:off x="5349240" y="1005840"/>
-            <a:ext cx="6522415" cy="731520"/>
+            <a:off x="1691640" y="1005840"/>
+            <a:ext cx="10180015" cy="731520"/>
           </a:xfrm>
           <a:prstGeom prst="rect">
             <a:avLst/>
@@ -13414,7 +13816,7 @@
                 <a:ea typeface="Times New Roman" pitchFamily="34" charset="-122"/>
                 <a:cs typeface="Times New Roman" pitchFamily="34" charset="-120"/>
               </a:rPr>
-              <a:t>Evaluation 2</a:t>
+              <a:t>2. Illustration of Pressure Belts and Planetary Winds</a:t>
             </a:r>
             <a:endParaRPr lang="en-US" sz="3600" dirty="0"/>
           </a:p>
@@ -13428,8 +13830,8 @@
         </p:nvSpPr>
         <p:spPr>
           <a:xfrm>
-            <a:off x="5349240" y="1783080"/>
-            <a:ext cx="6522415" cy="4663440"/>
+            <a:off x="1691640" y="1783080"/>
+            <a:ext cx="10180015" cy="4663440"/>
           </a:xfrm>
           <a:prstGeom prst="rect">
             <a:avLst/>
@@ -13448,7 +13850,7 @@
               <a:buNone/>
             </a:pPr>
             <a:r>
-              <a:rPr lang="en-US" sz="4000" dirty="0">
+              <a:rPr lang="en-US" sz="4000" b="1" dirty="0">
                 <a:solidFill>
                   <a:srgbClr val="111111"/>
                 </a:solidFill>
@@ -13456,7 +13858,98 @@
                 <a:ea typeface="Times New Roman" pitchFamily="34" charset="-122"/>
                 <a:cs typeface="Times New Roman" pitchFamily="34" charset="-120"/>
               </a:rPr>
-              <a:t>Which wind brings rain to Garoua?</a:t>
+              <a:t>Westerlies: </a:t>
+            </a:r>
+            <a:pPr algn="l" indent="0" marL="0">
+              <a:spcAft>
+                <a:spcPts val="800"/>
+              </a:spcAft>
+              <a:buNone/>
+            </a:pPr>
+            <a:r>
+              <a:rPr lang="en-US" sz="4000" dirty="0">
+                <a:solidFill>
+                  <a:srgbClr val="111111"/>
+                </a:solidFill>
+                <a:latin typeface="Times New Roman" pitchFamily="34" charset="0"/>
+                <a:ea typeface="Times New Roman" pitchFamily="34" charset="-122"/>
+                <a:cs typeface="Times New Roman" pitchFamily="34" charset="-120"/>
+              </a:rPr>
+              <a:t>They blow from the sub-tropical highs towards the temperate lows.</a:t>
+            </a:r>
+            <a:endParaRPr lang="en-US" sz="4000" dirty="0"/>
+          </a:p>
+          <a:p>
+            <a:pPr algn="l" indent="0" marL="0">
+              <a:spcAft>
+                <a:spcPts val="800"/>
+              </a:spcAft>
+              <a:buNone/>
+            </a:pPr>
+            <a:r>
+              <a:rPr lang="en-US" sz="4000" b="1" dirty="0">
+                <a:solidFill>
+                  <a:srgbClr val="111111"/>
+                </a:solidFill>
+                <a:latin typeface="Times New Roman" pitchFamily="34" charset="0"/>
+                <a:ea typeface="Times New Roman" pitchFamily="34" charset="-122"/>
+                <a:cs typeface="Times New Roman" pitchFamily="34" charset="-120"/>
+              </a:rPr>
+              <a:t>Polar easterlies: </a:t>
+            </a:r>
+            <a:pPr algn="l" indent="0" marL="0">
+              <a:spcAft>
+                <a:spcPts val="800"/>
+              </a:spcAft>
+              <a:buNone/>
+            </a:pPr>
+            <a:r>
+              <a:rPr lang="en-US" sz="4000" dirty="0">
+                <a:solidFill>
+                  <a:srgbClr val="111111"/>
+                </a:solidFill>
+                <a:latin typeface="Times New Roman" pitchFamily="34" charset="0"/>
+                <a:ea typeface="Times New Roman" pitchFamily="34" charset="-122"/>
+                <a:cs typeface="Times New Roman" pitchFamily="34" charset="-120"/>
+              </a:rPr>
+              <a:t>They blow from the polar highs towards the temperate lows.</a:t>
+            </a:r>
+            <a:endParaRPr lang="en-US" sz="4000" dirty="0"/>
+          </a:p>
+          <a:p>
+            <a:pPr algn="l" indent="0" marL="0">
+              <a:spcAft>
+                <a:spcPts val="800"/>
+              </a:spcAft>
+              <a:buNone/>
+            </a:pPr>
+            <a:r>
+              <a:rPr lang="en-US" sz="4000" b="1" dirty="0">
+                <a:solidFill>
+                  <a:srgbClr val="111111"/>
+                </a:solidFill>
+                <a:latin typeface="Times New Roman" pitchFamily="34" charset="0"/>
+                <a:ea typeface="Times New Roman" pitchFamily="34" charset="-122"/>
+                <a:cs typeface="Times New Roman" pitchFamily="34" charset="-120"/>
+              </a:rPr>
+              <a:t>Deflection: </a:t>
+            </a:r>
+            <a:pPr algn="l" indent="0" marL="0">
+              <a:spcAft>
+                <a:spcPts val="800"/>
+              </a:spcAft>
+              <a:buNone/>
+            </a:pPr>
+            <a:r>
+              <a:rPr lang="en-US" sz="4000" dirty="0">
+                <a:solidFill>
+                  <a:srgbClr val="111111"/>
+                </a:solidFill>
+                <a:latin typeface="Times New Roman" pitchFamily="34" charset="0"/>
+                <a:ea typeface="Times New Roman" pitchFamily="34" charset="-122"/>
+                <a:cs typeface="Times New Roman" pitchFamily="34" charset="-120"/>
+              </a:rPr>
+              <a:t>The rotation of the Earth bends the winds to the right in the north and to the left in the south.</a:t>
             </a:r>
             <a:endParaRPr lang="en-US" sz="4000" dirty="0"/>
           </a:p>
@@ -13568,15 +14061,115 @@
                 <a:ea typeface="Calibri" pitchFamily="34" charset="-122"/>
                 <a:cs typeface="Calibri" pitchFamily="34" charset="-120"/>
               </a:rPr>
-              <a:t>FORMATIVE EVALUATION</a:t>
+              <a:t>BOARD SUMMARY</a:t>
             </a:r>
             <a:endParaRPr lang="en-US" sz="1400" dirty="0"/>
+          </a:p>
+        </p:txBody>
+      </p:sp>
+      <p:sp>
+        <p:nvSpPr>
+          <p:cNvPr id="3" name="Text 1"/>
+          <p:cNvSpPr/>
+          <p:nvPr/>
+        </p:nvSpPr>
+        <p:spPr>
+          <a:xfrm>
+            <a:off x="365760" y="1005840"/>
+            <a:ext cx="11460175" cy="731520"/>
+          </a:xfrm>
+          <a:prstGeom prst="rect">
+            <a:avLst/>
+          </a:prstGeom>
+          <a:noFill/>
+          <a:ln/>
+        </p:spPr>
+        <p:txBody>
+          <a:bodyPr wrap="square" lIns="0" tIns="0" rIns="0" bIns="0" rtlCol="0" anchor="ctr">
+            <a:normAutofit/>
+          </a:bodyPr>
+          <a:lstStyle/>
+          <a:p>
+            <a:pPr algn="ctr" indent="0" marL="0">
+              <a:buNone/>
+            </a:pPr>
+            <a:r>
+              <a:rPr lang="en-US" sz="3600" b="1" dirty="0">
+                <a:solidFill>
+                  <a:srgbClr val="990011"/>
+                </a:solidFill>
+                <a:latin typeface="Times New Roman" pitchFamily="34" charset="0"/>
+                <a:ea typeface="Times New Roman" pitchFamily="34" charset="-122"/>
+                <a:cs typeface="Times New Roman" pitchFamily="34" charset="-120"/>
+              </a:rPr>
+              <a:t>2. Illustration of Pressure Belts and Planetary Winds</a:t>
+            </a:r>
+            <a:endParaRPr lang="en-US" sz="3600" dirty="0"/>
+          </a:p>
+        </p:txBody>
+      </p:sp>
+      <p:sp>
+        <p:nvSpPr>
+          <p:cNvPr id="4" name="Text 2"/>
+          <p:cNvSpPr/>
+          <p:nvPr/>
+        </p:nvSpPr>
+        <p:spPr>
+          <a:xfrm>
+            <a:off x="365760" y="1783080"/>
+            <a:ext cx="4846320" cy="4617720"/>
+          </a:xfrm>
+          <a:prstGeom prst="rect">
+            <a:avLst/>
+          </a:prstGeom>
+          <a:noFill/>
+          <a:ln/>
+        </p:spPr>
+        <p:txBody>
+          <a:bodyPr wrap="square" lIns="0" tIns="0" rIns="0" bIns="0" rtlCol="0" anchor="t"/>
+          <a:lstStyle/>
+          <a:p>
+            <a:pPr algn="l" indent="0" marL="0">
+              <a:spcAft>
+                <a:spcPts val="800"/>
+              </a:spcAft>
+              <a:buNone/>
+            </a:pPr>
+            <a:r>
+              <a:rPr lang="en-US" sz="3600" b="1" dirty="0">
+                <a:solidFill>
+                  <a:srgbClr val="111111"/>
+                </a:solidFill>
+                <a:latin typeface="Times New Roman" pitchFamily="34" charset="0"/>
+                <a:ea typeface="Times New Roman" pitchFamily="34" charset="-122"/>
+                <a:cs typeface="Times New Roman" pitchFamily="34" charset="-120"/>
+              </a:rPr>
+              <a:t>Seasonal shift: </a:t>
+            </a:r>
+            <a:pPr algn="l" indent="0" marL="0">
+              <a:spcAft>
+                <a:spcPts val="800"/>
+              </a:spcAft>
+              <a:buNone/>
+            </a:pPr>
+            <a:r>
+              <a:rPr lang="en-US" sz="3600" dirty="0">
+                <a:solidFill>
+                  <a:srgbClr val="111111"/>
+                </a:solidFill>
+                <a:latin typeface="Times New Roman" pitchFamily="34" charset="0"/>
+                <a:ea typeface="Times New Roman" pitchFamily="34" charset="-122"/>
+                <a:cs typeface="Times New Roman" pitchFamily="34" charset="-120"/>
+              </a:rPr>
+              <a:t>The belts move north in July and south in January, bringing the south-west monsoon, then the Harmattan, to Garoua.</a:t>
+            </a:r>
+            <a:endParaRPr lang="en-US" sz="3600" dirty="0"/>
           </a:p>
         </p:txBody>
       </p:sp>
       <p:pic>
         <p:nvPicPr>
-          <p:cNvPr id="3" name="Image 0" descr="/home/claude/f4/img/minesec_sheet.png">    </p:cNvPr>
+          <p:cNvPr id="5" name="Image 0" descr="/home/claude/f4/img/v2/itcz_july.png">    </p:cNvPr>
           <p:cNvPicPr>
             <a:picLocks noChangeAspect="1"/>
           </p:cNvPicPr>
@@ -13590,8 +14183,8 @@
         </p:blipFill>
         <p:spPr>
           <a:xfrm>
-            <a:off x="0" y="658368"/>
-            <a:ext cx="5120640" cy="5833872"/>
+            <a:off x="5349240" y="2617506"/>
+            <a:ext cx="6659575" cy="2601397"/>
           </a:xfrm>
           <a:prstGeom prst="rect">
             <a:avLst/>
@@ -13600,14 +14193,14 @@
       </p:pic>
       <p:sp>
         <p:nvSpPr>
-          <p:cNvPr id="4" name="Text 1"/>
+          <p:cNvPr id="6" name="Text 3"/>
           <p:cNvSpPr/>
           <p:nvPr/>
         </p:nvSpPr>
         <p:spPr>
           <a:xfrm>
-            <a:off x="5349240" y="1005840"/>
-            <a:ext cx="6522415" cy="731520"/>
+            <a:off x="5349240" y="6089904"/>
+            <a:ext cx="6659575" cy="347472"/>
           </a:xfrm>
           <a:prstGeom prst="rect">
             <a:avLst/>
@@ -13616,68 +14209,24 @@
           <a:ln/>
         </p:spPr>
         <p:txBody>
-          <a:bodyPr wrap="square" lIns="0" tIns="0" rIns="0" bIns="0" rtlCol="0" anchor="ctr">
-            <a:normAutofit/>
-          </a:bodyPr>
+          <a:bodyPr wrap="square" lIns="0" tIns="0" rIns="0" bIns="0" rtlCol="0" anchor="ctr"/>
           <a:lstStyle/>
           <a:p>
             <a:pPr algn="ctr" indent="0" marL="0">
               <a:buNone/>
             </a:pPr>
             <a:r>
-              <a:rPr lang="en-US" sz="3600" b="1" dirty="0">
-                <a:solidFill>
-                  <a:srgbClr val="990011"/>
+              <a:rPr lang="en-US" sz="1600" i="1" dirty="0">
+                <a:solidFill>
+                  <a:srgbClr val="555555"/>
                 </a:solidFill>
                 <a:latin typeface="Times New Roman" pitchFamily="34" charset="0"/>
                 <a:ea typeface="Times New Roman" pitchFamily="34" charset="-122"/>
                 <a:cs typeface="Times New Roman" pitchFamily="34" charset="-120"/>
               </a:rPr>
-              <a:t>Expected Answer</a:t>
-            </a:r>
-            <a:endParaRPr lang="en-US" sz="3600" dirty="0"/>
-          </a:p>
-        </p:txBody>
-      </p:sp>
-      <p:sp>
-        <p:nvSpPr>
-          <p:cNvPr id="5" name="Text 2"/>
-          <p:cNvSpPr/>
-          <p:nvPr/>
-        </p:nvSpPr>
-        <p:spPr>
-          <a:xfrm>
-            <a:off x="5349240" y="1783080"/>
-            <a:ext cx="6522415" cy="4663440"/>
-          </a:xfrm>
-          <a:prstGeom prst="rect">
-            <a:avLst/>
-          </a:prstGeom>
-          <a:noFill/>
-          <a:ln/>
-        </p:spPr>
-        <p:txBody>
-          <a:bodyPr wrap="square" lIns="0" tIns="0" rIns="0" bIns="0" rtlCol="0" anchor="t"/>
-          <a:lstStyle/>
-          <a:p>
-            <a:pPr algn="l" indent="0" marL="0">
-              <a:spcAft>
-                <a:spcPts val="800"/>
-              </a:spcAft>
-              <a:buNone/>
-            </a:pPr>
-            <a:r>
-              <a:rPr lang="en-US" sz="4000" dirty="0">
-                <a:solidFill>
-                  <a:srgbClr val="111111"/>
-                </a:solidFill>
-                <a:latin typeface="Times New Roman" pitchFamily="34" charset="0"/>
-                <a:ea typeface="Times New Roman" pitchFamily="34" charset="-122"/>
-                <a:cs typeface="Times New Roman" pitchFamily="34" charset="-120"/>
-              </a:rPr>
-              <a:t>The south-west wind (monsoon) in the wet season.</a:t>
-            </a:r>
-            <a:endParaRPr lang="en-US" sz="4000" dirty="0"/>
+              <a:t>Illustration: the rain belt in July</a:t>
+            </a:r>
+            <a:endParaRPr lang="en-US" sz="1600" dirty="0"/>
           </a:p>
         </p:txBody>
       </p:sp>
@@ -13787,7 +14336,7 @@
                 <a:ea typeface="Calibri" pitchFamily="34" charset="-122"/>
                 <a:cs typeface="Calibri" pitchFamily="34" charset="-120"/>
               </a:rPr>
-              <a:t>REMEDIATION</a:t>
+              <a:t>FORMATIVE EVALUATION</a:t>
             </a:r>
             <a:endParaRPr lang="en-US" sz="1400" dirty="0"/>
           </a:p>
@@ -13810,7 +14359,7 @@
         <p:spPr>
           <a:xfrm>
             <a:off x="0" y="658368"/>
-            <a:ext cx="1463040" cy="5833872"/>
+            <a:ext cx="5120640" cy="5833872"/>
           </a:xfrm>
           <a:prstGeom prst="rect">
             <a:avLst/>
@@ -13825,8 +14374,8 @@
         </p:nvSpPr>
         <p:spPr>
           <a:xfrm>
-            <a:off x="1691640" y="1005840"/>
-            <a:ext cx="10180015" cy="731520"/>
+            <a:off x="5349240" y="1005840"/>
+            <a:ext cx="6522415" cy="731520"/>
           </a:xfrm>
           <a:prstGeom prst="rect">
             <a:avLst/>
@@ -13852,7 +14401,7 @@
                 <a:ea typeface="Times New Roman" pitchFamily="34" charset="-122"/>
                 <a:cs typeface="Times New Roman" pitchFamily="34" charset="-120"/>
               </a:rPr>
-              <a:t>Remediation</a:t>
+              <a:t>Evaluation 1</a:t>
             </a:r>
             <a:endParaRPr lang="en-US" sz="3600" dirty="0"/>
           </a:p>
@@ -13866,8 +14415,8 @@
         </p:nvSpPr>
         <p:spPr>
           <a:xfrm>
-            <a:off x="1691640" y="1783080"/>
-            <a:ext cx="10180015" cy="4663440"/>
+            <a:off x="5349240" y="1783080"/>
+            <a:ext cx="6522415" cy="4663440"/>
           </a:xfrm>
           <a:prstGeom prst="rect">
             <a:avLst/>
@@ -13886,7 +14435,7 @@
               <a:buNone/>
             </a:pPr>
             <a:r>
-              <a:rPr lang="en-US" sz="4000" b="1" dirty="0">
+              <a:rPr lang="en-US" sz="4000" dirty="0">
                 <a:solidFill>
                   <a:srgbClr val="111111"/>
                 </a:solidFill>
@@ -13894,73 +14443,7 @@
                 <a:ea typeface="Times New Roman" pitchFamily="34" charset="-122"/>
                 <a:cs typeface="Times New Roman" pitchFamily="34" charset="-120"/>
               </a:rPr>
-              <a:t>Fill in the blanks:</a:t>
-            </a:r>
-            <a:endParaRPr lang="en-US" sz="4000" dirty="0"/>
-          </a:p>
-          <a:p>
-            <a:pPr algn="l" marL="342900" indent="-342900">
-              <a:spcAft>
-                <a:spcPts val="800"/>
-              </a:spcAft>
-              <a:buSzPct val="100000"/>
-              <a:buFont typeface="+mj-lt"/>
-              <a:buAutoNum type="arabicPeriod" startAt="1"/>
-            </a:pPr>
-            <a:r>
-              <a:rPr lang="en-US" sz="4000" dirty="0">
-                <a:solidFill>
-                  <a:srgbClr val="111111"/>
-                </a:solidFill>
-                <a:latin typeface="Times New Roman" pitchFamily="34" charset="0"/>
-                <a:ea typeface="Times New Roman" pitchFamily="34" charset="-122"/>
-                <a:cs typeface="Times New Roman" pitchFamily="34" charset="-120"/>
-              </a:rPr>
-              <a:t>At the Equator, the pressure is ______.</a:t>
-            </a:r>
-            <a:endParaRPr lang="en-US" sz="4000" dirty="0"/>
-          </a:p>
-          <a:p>
-            <a:pPr algn="l" marL="342900" indent="-342900">
-              <a:spcAft>
-                <a:spcPts val="800"/>
-              </a:spcAft>
-              <a:buSzPct val="100000"/>
-              <a:buFont typeface="+mj-lt"/>
-              <a:buAutoNum type="arabicPeriod" startAt="1"/>
-            </a:pPr>
-            <a:r>
-              <a:rPr lang="en-US" sz="4000" dirty="0">
-                <a:solidFill>
-                  <a:srgbClr val="111111"/>
-                </a:solidFill>
-                <a:latin typeface="Times New Roman" pitchFamily="34" charset="0"/>
-                <a:ea typeface="Times New Roman" pitchFamily="34" charset="-122"/>
-                <a:cs typeface="Times New Roman" pitchFamily="34" charset="-120"/>
-              </a:rPr>
-              <a:t>The winds that blow to the Equator are the ______ Winds.</a:t>
-            </a:r>
-            <a:endParaRPr lang="en-US" sz="4000" dirty="0"/>
-          </a:p>
-          <a:p>
-            <a:pPr algn="l" marL="342900" indent="-342900">
-              <a:spcAft>
-                <a:spcPts val="800"/>
-              </a:spcAft>
-              <a:buSzPct val="100000"/>
-              <a:buFont typeface="+mj-lt"/>
-              <a:buAutoNum type="arabicPeriod" startAt="1"/>
-            </a:pPr>
-            <a:r>
-              <a:rPr lang="en-US" sz="4000" dirty="0">
-                <a:solidFill>
-                  <a:srgbClr val="111111"/>
-                </a:solidFill>
-                <a:latin typeface="Times New Roman" pitchFamily="34" charset="0"/>
-                <a:ea typeface="Times New Roman" pitchFamily="34" charset="-122"/>
-                <a:cs typeface="Times New Roman" pitchFamily="34" charset="-120"/>
-              </a:rPr>
-              <a:t>The dry wind of January in Garoua is the ______.</a:t>
+              <a:t>Where is the Equatorial Low?</a:t>
             </a:r>
             <a:endParaRPr lang="en-US" sz="4000" dirty="0"/>
           </a:p>
@@ -14072,7 +14555,7 @@
                 <a:ea typeface="Calibri" pitchFamily="34" charset="-122"/>
                 <a:cs typeface="Calibri" pitchFamily="34" charset="-120"/>
               </a:rPr>
-              <a:t>HOMEWORK</a:t>
+              <a:t>FORMATIVE EVALUATION</a:t>
             </a:r>
             <a:endParaRPr lang="en-US" sz="1400" dirty="0"/>
           </a:p>
@@ -14137,7 +14620,7 @@
                 <a:ea typeface="Times New Roman" pitchFamily="34" charset="-122"/>
                 <a:cs typeface="Times New Roman" pitchFamily="34" charset="-120"/>
               </a:rPr>
-              <a:t>Homework</a:t>
+              <a:t>Expected Answer</a:t>
             </a:r>
             <a:endParaRPr lang="en-US" sz="3600" dirty="0"/>
           </a:p>
@@ -14179,7 +14662,7 @@
                 <a:ea typeface="Times New Roman" pitchFamily="34" charset="-122"/>
                 <a:cs typeface="Times New Roman" pitchFamily="34" charset="-120"/>
               </a:rPr>
-              <a:t>Ask someone who has lived by the sea (Douala, Kribi or Limbe) or in the mountains (Buea, Mokolo) whether the wind changes between day and night. Write down what they say.</a:t>
+              <a:t>At the Equator (0°).</a:t>
             </a:r>
             <a:endParaRPr lang="en-US" sz="4000" dirty="0"/>
           </a:p>
@@ -14530,7 +15013,7 @@
                 <a:ea typeface="Calibri" pitchFamily="34" charset="-122"/>
                 <a:cs typeface="Calibri" pitchFamily="34" charset="-120"/>
               </a:rPr>
-              <a:t>NEXT LESSON</a:t>
+              <a:t>FORMATIVE EVALUATION</a:t>
             </a:r>
             <a:endParaRPr lang="en-US" sz="1400" dirty="0"/>
           </a:p>
@@ -14595,7 +15078,7 @@
                 <a:ea typeface="Times New Roman" pitchFamily="34" charset="-122"/>
                 <a:cs typeface="Times New Roman" pitchFamily="34" charset="-120"/>
               </a:rPr>
-              <a:t>Next Lesson</a:t>
+              <a:t>Evaluation 2</a:t>
             </a:r>
             <a:endParaRPr lang="en-US" sz="3600" dirty="0"/>
           </a:p>
@@ -14619,17 +15102,17 @@
           <a:ln/>
         </p:spPr>
         <p:txBody>
-          <a:bodyPr wrap="square" lIns="0" tIns="0" rIns="0" bIns="0" rtlCol="0" anchor="ctr"/>
-          <a:lstStyle/>
-          <a:p>
-            <a:pPr algn="ctr" indent="0" marL="0">
+          <a:bodyPr wrap="square" lIns="0" tIns="0" rIns="0" bIns="0" rtlCol="0" anchor="t"/>
+          <a:lstStyle/>
+          <a:p>
+            <a:pPr algn="l" indent="0" marL="0">
               <a:spcAft>
                 <a:spcPts val="800"/>
               </a:spcAft>
               <a:buNone/>
             </a:pPr>
             <a:r>
-              <a:rPr lang="en-US" sz="4000" b="1" dirty="0">
+              <a:rPr lang="en-US" sz="4000" dirty="0">
                 <a:solidFill>
                   <a:srgbClr val="111111"/>
                 </a:solidFill>
@@ -14637,27 +15120,7 @@
                 <a:ea typeface="Times New Roman" pitchFamily="34" charset="-122"/>
                 <a:cs typeface="Times New Roman" pitchFamily="34" charset="-120"/>
               </a:rPr>
-              <a:t>Our next lesson will be on:</a:t>
-            </a:r>
-            <a:endParaRPr lang="en-US" sz="4000" dirty="0"/>
-          </a:p>
-          <a:p>
-            <a:pPr algn="ctr" indent="0" marL="0">
-              <a:spcAft>
-                <a:spcPts val="800"/>
-              </a:spcAft>
-              <a:buNone/>
-            </a:pPr>
-            <a:r>
-              <a:rPr lang="en-US" sz="4000" b="1" dirty="0">
-                <a:solidFill>
-                  <a:srgbClr val="990011"/>
-                </a:solidFill>
-                <a:latin typeface="Times New Roman" pitchFamily="34" charset="0"/>
-                <a:ea typeface="Times New Roman" pitchFamily="34" charset="-122"/>
-                <a:cs typeface="Times New Roman" pitchFamily="34" charset="-120"/>
-              </a:rPr>
-              <a:t>Lesson 37: Local Winds</a:t>
+              <a:t>Which wind brings rain to Garoua?</a:t>
             </a:r>
             <a:endParaRPr lang="en-US" sz="4000" dirty="0"/>
           </a:p>
@@ -14769,6 +15232,968 @@
                 <a:ea typeface="Calibri" pitchFamily="34" charset="-122"/>
                 <a:cs typeface="Calibri" pitchFamily="34" charset="-120"/>
               </a:rPr>
+              <a:t>FORMATIVE EVALUATION</a:t>
+            </a:r>
+            <a:endParaRPr lang="en-US" sz="1400" dirty="0"/>
+          </a:p>
+        </p:txBody>
+      </p:sp>
+      <p:pic>
+        <p:nvPicPr>
+          <p:cNvPr id="3" name="Image 0" descr="/home/claude/f4/img/minesec_sheet.png">    </p:cNvPr>
+          <p:cNvPicPr>
+            <a:picLocks noChangeAspect="1"/>
+          </p:cNvPicPr>
+          <p:nvPr/>
+        </p:nvPicPr>
+        <p:blipFill>
+          <a:blip r:embed="rId1"/>
+          <a:stretch>
+            <a:fillRect/>
+          </a:stretch>
+        </p:blipFill>
+        <p:spPr>
+          <a:xfrm>
+            <a:off x="0" y="658368"/>
+            <a:ext cx="5120640" cy="5833872"/>
+          </a:xfrm>
+          <a:prstGeom prst="rect">
+            <a:avLst/>
+          </a:prstGeom>
+        </p:spPr>
+      </p:pic>
+      <p:sp>
+        <p:nvSpPr>
+          <p:cNvPr id="4" name="Text 1"/>
+          <p:cNvSpPr/>
+          <p:nvPr/>
+        </p:nvSpPr>
+        <p:spPr>
+          <a:xfrm>
+            <a:off x="5349240" y="1005840"/>
+            <a:ext cx="6522415" cy="731520"/>
+          </a:xfrm>
+          <a:prstGeom prst="rect">
+            <a:avLst/>
+          </a:prstGeom>
+          <a:noFill/>
+          <a:ln/>
+        </p:spPr>
+        <p:txBody>
+          <a:bodyPr wrap="square" lIns="0" tIns="0" rIns="0" bIns="0" rtlCol="0" anchor="ctr">
+            <a:normAutofit/>
+          </a:bodyPr>
+          <a:lstStyle/>
+          <a:p>
+            <a:pPr algn="ctr" indent="0" marL="0">
+              <a:buNone/>
+            </a:pPr>
+            <a:r>
+              <a:rPr lang="en-US" sz="3600" b="1" dirty="0">
+                <a:solidFill>
+                  <a:srgbClr val="990011"/>
+                </a:solidFill>
+                <a:latin typeface="Times New Roman" pitchFamily="34" charset="0"/>
+                <a:ea typeface="Times New Roman" pitchFamily="34" charset="-122"/>
+                <a:cs typeface="Times New Roman" pitchFamily="34" charset="-120"/>
+              </a:rPr>
+              <a:t>Expected Answer</a:t>
+            </a:r>
+            <a:endParaRPr lang="en-US" sz="3600" dirty="0"/>
+          </a:p>
+        </p:txBody>
+      </p:sp>
+      <p:sp>
+        <p:nvSpPr>
+          <p:cNvPr id="5" name="Text 2"/>
+          <p:cNvSpPr/>
+          <p:nvPr/>
+        </p:nvSpPr>
+        <p:spPr>
+          <a:xfrm>
+            <a:off x="5349240" y="1783080"/>
+            <a:ext cx="6522415" cy="4663440"/>
+          </a:xfrm>
+          <a:prstGeom prst="rect">
+            <a:avLst/>
+          </a:prstGeom>
+          <a:noFill/>
+          <a:ln/>
+        </p:spPr>
+        <p:txBody>
+          <a:bodyPr wrap="square" lIns="0" tIns="0" rIns="0" bIns="0" rtlCol="0" anchor="t"/>
+          <a:lstStyle/>
+          <a:p>
+            <a:pPr algn="l" indent="0" marL="0">
+              <a:spcAft>
+                <a:spcPts val="800"/>
+              </a:spcAft>
+              <a:buNone/>
+            </a:pPr>
+            <a:r>
+              <a:rPr lang="en-US" sz="4000" dirty="0">
+                <a:solidFill>
+                  <a:srgbClr val="111111"/>
+                </a:solidFill>
+                <a:latin typeface="Times New Roman" pitchFamily="34" charset="0"/>
+                <a:ea typeface="Times New Roman" pitchFamily="34" charset="-122"/>
+                <a:cs typeface="Times New Roman" pitchFamily="34" charset="-120"/>
+              </a:rPr>
+              <a:t>The south-west wind (monsoon) in the wet season.</a:t>
+            </a:r>
+            <a:endParaRPr lang="en-US" sz="4000" dirty="0"/>
+          </a:p>
+        </p:txBody>
+      </p:sp>
+      <p:sp>
+        <p:nvSpPr>
+          <p:cNvPr id="25" name="Slide Number Placeholder 0"/>
+          <p:cNvSpPr>
+            <a:spLocks noGrp="1"/>
+          </p:cNvSpPr>
+          <p:nvPr>
+            <p:ph type="sldNum" sz="quarter" idx="4294967295"/>
+          </p:nvPr>
+        </p:nvSpPr>
+        <p:spPr>
+          <a:xfrm>
+            <a:off x="27432" y="91440"/>
+            <a:ext cx="585216" cy="475488"/>
+          </a:xfrm>
+          <a:prstGeom prst="rect">
+            <a:avLst/>
+          </a:prstGeom>
+          <a:extLst>
+            <a:ext uri="{C572A759-6A51-4108-AA02-DFA0A04FC94B}">
+              <ma14:wrappingTextBoxFlag xmlns:ma14="http://schemas.microsoft.com/office/mac/drawingml/2011/main" val="0"/>
+            </a:ext>
+          </a:extLst>
+        </p:spPr>
+        <p:txBody>
+          <a:bodyPr/>
+          <a:lstStyle>
+            <a:lvl1pPr>
+              <a:defRPr sz="2000">
+                <a:solidFill>
+                  <a:srgbClr val="FFFFFF"/>
+                </a:solidFill>
+                <a:latin typeface="Calibri"/>
+                <a:ea typeface="Calibri"/>
+                <a:cs typeface="Calibri"/>
+              </a:defRPr>
+            </a:lvl1pPr>
+          </a:lstStyle>
+          <a:p>
+            <a:pPr algn="ctr"/>
+            <a:fld id="{F7021451-1387-4CA6-816F-3879F97B5CBC}" type="slidenum">
+              <a:rPr b="1" lang="en-US"/>
+              <a:t>41</a:t>
+            </a:fld>
+            <a:endParaRPr lang="en-US"/>
+          </a:p>
+        </p:txBody>
+      </p:sp>
+    </p:spTree>
+  </p:cSld>
+  <p:clrMapOvr>
+    <a:masterClrMapping/>
+  </p:clrMapOvr>
+</p:sld>
+</file>
+
+<file path=ppt/slides/slide42.xml><?xml version="1.0" encoding="utf-8"?>
+<p:sld xmlns:a="http://schemas.openxmlformats.org/drawingml/2006/main" xmlns:r="http://schemas.openxmlformats.org/officeDocument/2006/relationships" xmlns:p="http://schemas.openxmlformats.org/presentationml/2006/main">
+  <p:cSld name="Slide 42">
+    <p:spTree>
+      <p:nvGrpSpPr>
+        <p:cNvPr id="1" name=""/>
+        <p:cNvGrpSpPr/>
+        <p:nvPr/>
+      </p:nvGrpSpPr>
+      <p:grpSpPr>
+        <a:xfrm>
+          <a:off x="0" y="0"/>
+          <a:ext cx="0" cy="0"/>
+          <a:chOff x="0" y="0"/>
+          <a:chExt cx="0" cy="0"/>
+        </a:xfrm>
+      </p:grpSpPr>
+      <p:sp>
+        <p:nvSpPr>
+          <p:cNvPr id="2" name="Text 0"/>
+          <p:cNvSpPr/>
+          <p:nvPr/>
+        </p:nvSpPr>
+        <p:spPr>
+          <a:xfrm>
+            <a:off x="457200" y="713232"/>
+            <a:ext cx="11368735" cy="274320"/>
+          </a:xfrm>
+          <a:prstGeom prst="rect">
+            <a:avLst/>
+          </a:prstGeom>
+          <a:noFill/>
+          <a:ln/>
+        </p:spPr>
+        <p:txBody>
+          <a:bodyPr wrap="square" lIns="0" tIns="0" rIns="0" bIns="0" rtlCol="0" anchor="ctr"/>
+          <a:lstStyle/>
+          <a:p>
+            <a:pPr algn="r" indent="0" marL="0">
+              <a:buNone/>
+            </a:pPr>
+            <a:r>
+              <a:rPr lang="en-US" sz="1400" b="1" dirty="0">
+                <a:solidFill>
+                  <a:srgbClr val="1C3F6E"/>
+                </a:solidFill>
+                <a:latin typeface="Calibri" pitchFamily="34" charset="0"/>
+                <a:ea typeface="Calibri" pitchFamily="34" charset="-122"/>
+                <a:cs typeface="Calibri" pitchFamily="34" charset="-120"/>
+              </a:rPr>
+              <a:t>REMEDIATION</a:t>
+            </a:r>
+            <a:endParaRPr lang="en-US" sz="1400" dirty="0"/>
+          </a:p>
+        </p:txBody>
+      </p:sp>
+      <p:pic>
+        <p:nvPicPr>
+          <p:cNvPr id="3" name="Image 0" descr="/home/claude/f4/img/minesec_sheet.png">    </p:cNvPr>
+          <p:cNvPicPr>
+            <a:picLocks noChangeAspect="1"/>
+          </p:cNvPicPr>
+          <p:nvPr/>
+        </p:nvPicPr>
+        <p:blipFill>
+          <a:blip r:embed="rId1"/>
+          <a:stretch>
+            <a:fillRect/>
+          </a:stretch>
+        </p:blipFill>
+        <p:spPr>
+          <a:xfrm>
+            <a:off x="0" y="658368"/>
+            <a:ext cx="1463040" cy="5833872"/>
+          </a:xfrm>
+          <a:prstGeom prst="rect">
+            <a:avLst/>
+          </a:prstGeom>
+        </p:spPr>
+      </p:pic>
+      <p:sp>
+        <p:nvSpPr>
+          <p:cNvPr id="4" name="Text 1"/>
+          <p:cNvSpPr/>
+          <p:nvPr/>
+        </p:nvSpPr>
+        <p:spPr>
+          <a:xfrm>
+            <a:off x="1691640" y="1005840"/>
+            <a:ext cx="10180015" cy="731520"/>
+          </a:xfrm>
+          <a:prstGeom prst="rect">
+            <a:avLst/>
+          </a:prstGeom>
+          <a:noFill/>
+          <a:ln/>
+        </p:spPr>
+        <p:txBody>
+          <a:bodyPr wrap="square" lIns="0" tIns="0" rIns="0" bIns="0" rtlCol="0" anchor="ctr">
+            <a:normAutofit/>
+          </a:bodyPr>
+          <a:lstStyle/>
+          <a:p>
+            <a:pPr algn="ctr" indent="0" marL="0">
+              <a:buNone/>
+            </a:pPr>
+            <a:r>
+              <a:rPr lang="en-US" sz="3600" b="1" dirty="0">
+                <a:solidFill>
+                  <a:srgbClr val="990011"/>
+                </a:solidFill>
+                <a:latin typeface="Times New Roman" pitchFamily="34" charset="0"/>
+                <a:ea typeface="Times New Roman" pitchFamily="34" charset="-122"/>
+                <a:cs typeface="Times New Roman" pitchFamily="34" charset="-120"/>
+              </a:rPr>
+              <a:t>Remediation</a:t>
+            </a:r>
+            <a:endParaRPr lang="en-US" sz="3600" dirty="0"/>
+          </a:p>
+        </p:txBody>
+      </p:sp>
+      <p:sp>
+        <p:nvSpPr>
+          <p:cNvPr id="5" name="Text 2"/>
+          <p:cNvSpPr/>
+          <p:nvPr/>
+        </p:nvSpPr>
+        <p:spPr>
+          <a:xfrm>
+            <a:off x="1691640" y="1783080"/>
+            <a:ext cx="10180015" cy="4663440"/>
+          </a:xfrm>
+          <a:prstGeom prst="rect">
+            <a:avLst/>
+          </a:prstGeom>
+          <a:noFill/>
+          <a:ln/>
+        </p:spPr>
+        <p:txBody>
+          <a:bodyPr wrap="square" lIns="0" tIns="0" rIns="0" bIns="0" rtlCol="0" anchor="t"/>
+          <a:lstStyle/>
+          <a:p>
+            <a:pPr algn="l" indent="0" marL="0">
+              <a:spcAft>
+                <a:spcPts val="800"/>
+              </a:spcAft>
+              <a:buNone/>
+            </a:pPr>
+            <a:r>
+              <a:rPr lang="en-US" sz="4000" b="1" dirty="0">
+                <a:solidFill>
+                  <a:srgbClr val="111111"/>
+                </a:solidFill>
+                <a:latin typeface="Times New Roman" pitchFamily="34" charset="0"/>
+                <a:ea typeface="Times New Roman" pitchFamily="34" charset="-122"/>
+                <a:cs typeface="Times New Roman" pitchFamily="34" charset="-120"/>
+              </a:rPr>
+              <a:t>Fill in the blanks:</a:t>
+            </a:r>
+            <a:endParaRPr lang="en-US" sz="4000" dirty="0"/>
+          </a:p>
+          <a:p>
+            <a:pPr algn="l" marL="342900" indent="-342900">
+              <a:spcAft>
+                <a:spcPts val="800"/>
+              </a:spcAft>
+              <a:buSzPct val="100000"/>
+              <a:buFont typeface="+mj-lt"/>
+              <a:buAutoNum type="arabicPeriod" startAt="1"/>
+            </a:pPr>
+            <a:r>
+              <a:rPr lang="en-US" sz="4000" dirty="0">
+                <a:solidFill>
+                  <a:srgbClr val="111111"/>
+                </a:solidFill>
+                <a:latin typeface="Times New Roman" pitchFamily="34" charset="0"/>
+                <a:ea typeface="Times New Roman" pitchFamily="34" charset="-122"/>
+                <a:cs typeface="Times New Roman" pitchFamily="34" charset="-120"/>
+              </a:rPr>
+              <a:t>At the Equator, the pressure is ______.</a:t>
+            </a:r>
+            <a:endParaRPr lang="en-US" sz="4000" dirty="0"/>
+          </a:p>
+          <a:p>
+            <a:pPr algn="l" marL="342900" indent="-342900">
+              <a:spcAft>
+                <a:spcPts val="800"/>
+              </a:spcAft>
+              <a:buSzPct val="100000"/>
+              <a:buFont typeface="+mj-lt"/>
+              <a:buAutoNum type="arabicPeriod" startAt="1"/>
+            </a:pPr>
+            <a:r>
+              <a:rPr lang="en-US" sz="4000" dirty="0">
+                <a:solidFill>
+                  <a:srgbClr val="111111"/>
+                </a:solidFill>
+                <a:latin typeface="Times New Roman" pitchFamily="34" charset="0"/>
+                <a:ea typeface="Times New Roman" pitchFamily="34" charset="-122"/>
+                <a:cs typeface="Times New Roman" pitchFamily="34" charset="-120"/>
+              </a:rPr>
+              <a:t>The winds that blow to the Equator are the ______ Winds.</a:t>
+            </a:r>
+            <a:endParaRPr lang="en-US" sz="4000" dirty="0"/>
+          </a:p>
+          <a:p>
+            <a:pPr algn="l" marL="342900" indent="-342900">
+              <a:spcAft>
+                <a:spcPts val="800"/>
+              </a:spcAft>
+              <a:buSzPct val="100000"/>
+              <a:buFont typeface="+mj-lt"/>
+              <a:buAutoNum type="arabicPeriod" startAt="1"/>
+            </a:pPr>
+            <a:r>
+              <a:rPr lang="en-US" sz="4000" dirty="0">
+                <a:solidFill>
+                  <a:srgbClr val="111111"/>
+                </a:solidFill>
+                <a:latin typeface="Times New Roman" pitchFamily="34" charset="0"/>
+                <a:ea typeface="Times New Roman" pitchFamily="34" charset="-122"/>
+                <a:cs typeface="Times New Roman" pitchFamily="34" charset="-120"/>
+              </a:rPr>
+              <a:t>The dry wind of January in Garoua is the ______.</a:t>
+            </a:r>
+            <a:endParaRPr lang="en-US" sz="4000" dirty="0"/>
+          </a:p>
+        </p:txBody>
+      </p:sp>
+      <p:sp>
+        <p:nvSpPr>
+          <p:cNvPr id="25" name="Slide Number Placeholder 0"/>
+          <p:cNvSpPr>
+            <a:spLocks noGrp="1"/>
+          </p:cNvSpPr>
+          <p:nvPr>
+            <p:ph type="sldNum" sz="quarter" idx="4294967295"/>
+          </p:nvPr>
+        </p:nvSpPr>
+        <p:spPr>
+          <a:xfrm>
+            <a:off x="27432" y="91440"/>
+            <a:ext cx="585216" cy="475488"/>
+          </a:xfrm>
+          <a:prstGeom prst="rect">
+            <a:avLst/>
+          </a:prstGeom>
+          <a:extLst>
+            <a:ext uri="{C572A759-6A51-4108-AA02-DFA0A04FC94B}">
+              <ma14:wrappingTextBoxFlag xmlns:ma14="http://schemas.microsoft.com/office/mac/drawingml/2011/main" val="0"/>
+            </a:ext>
+          </a:extLst>
+        </p:spPr>
+        <p:txBody>
+          <a:bodyPr/>
+          <a:lstStyle>
+            <a:lvl1pPr>
+              <a:defRPr sz="2000">
+                <a:solidFill>
+                  <a:srgbClr val="FFFFFF"/>
+                </a:solidFill>
+                <a:latin typeface="Calibri"/>
+                <a:ea typeface="Calibri"/>
+                <a:cs typeface="Calibri"/>
+              </a:defRPr>
+            </a:lvl1pPr>
+          </a:lstStyle>
+          <a:p>
+            <a:pPr algn="ctr"/>
+            <a:fld id="{F7021451-1387-4CA6-816F-3879F97B5CBC}" type="slidenum">
+              <a:rPr b="1" lang="en-US"/>
+              <a:t>42</a:t>
+            </a:fld>
+            <a:endParaRPr lang="en-US"/>
+          </a:p>
+        </p:txBody>
+      </p:sp>
+    </p:spTree>
+  </p:cSld>
+  <p:clrMapOvr>
+    <a:masterClrMapping/>
+  </p:clrMapOvr>
+</p:sld>
+</file>
+
+<file path=ppt/slides/slide43.xml><?xml version="1.0" encoding="utf-8"?>
+<p:sld xmlns:a="http://schemas.openxmlformats.org/drawingml/2006/main" xmlns:r="http://schemas.openxmlformats.org/officeDocument/2006/relationships" xmlns:p="http://schemas.openxmlformats.org/presentationml/2006/main">
+  <p:cSld name="Slide 43">
+    <p:spTree>
+      <p:nvGrpSpPr>
+        <p:cNvPr id="1" name=""/>
+        <p:cNvGrpSpPr/>
+        <p:nvPr/>
+      </p:nvGrpSpPr>
+      <p:grpSpPr>
+        <a:xfrm>
+          <a:off x="0" y="0"/>
+          <a:ext cx="0" cy="0"/>
+          <a:chOff x="0" y="0"/>
+          <a:chExt cx="0" cy="0"/>
+        </a:xfrm>
+      </p:grpSpPr>
+      <p:sp>
+        <p:nvSpPr>
+          <p:cNvPr id="2" name="Text 0"/>
+          <p:cNvSpPr/>
+          <p:nvPr/>
+        </p:nvSpPr>
+        <p:spPr>
+          <a:xfrm>
+            <a:off x="457200" y="713232"/>
+            <a:ext cx="11368735" cy="274320"/>
+          </a:xfrm>
+          <a:prstGeom prst="rect">
+            <a:avLst/>
+          </a:prstGeom>
+          <a:noFill/>
+          <a:ln/>
+        </p:spPr>
+        <p:txBody>
+          <a:bodyPr wrap="square" lIns="0" tIns="0" rIns="0" bIns="0" rtlCol="0" anchor="ctr"/>
+          <a:lstStyle/>
+          <a:p>
+            <a:pPr algn="r" indent="0" marL="0">
+              <a:buNone/>
+            </a:pPr>
+            <a:r>
+              <a:rPr lang="en-US" sz="1400" b="1" dirty="0">
+                <a:solidFill>
+                  <a:srgbClr val="1C3F6E"/>
+                </a:solidFill>
+                <a:latin typeface="Calibri" pitchFamily="34" charset="0"/>
+                <a:ea typeface="Calibri" pitchFamily="34" charset="-122"/>
+                <a:cs typeface="Calibri" pitchFamily="34" charset="-120"/>
+              </a:rPr>
+              <a:t>HOMEWORK</a:t>
+            </a:r>
+            <a:endParaRPr lang="en-US" sz="1400" dirty="0"/>
+          </a:p>
+        </p:txBody>
+      </p:sp>
+      <p:pic>
+        <p:nvPicPr>
+          <p:cNvPr id="3" name="Image 0" descr="/home/claude/f4/img/minesec_sheet.png">    </p:cNvPr>
+          <p:cNvPicPr>
+            <a:picLocks noChangeAspect="1"/>
+          </p:cNvPicPr>
+          <p:nvPr/>
+        </p:nvPicPr>
+        <p:blipFill>
+          <a:blip r:embed="rId1"/>
+          <a:stretch>
+            <a:fillRect/>
+          </a:stretch>
+        </p:blipFill>
+        <p:spPr>
+          <a:xfrm>
+            <a:off x="0" y="658368"/>
+            <a:ext cx="5120640" cy="5833872"/>
+          </a:xfrm>
+          <a:prstGeom prst="rect">
+            <a:avLst/>
+          </a:prstGeom>
+        </p:spPr>
+      </p:pic>
+      <p:sp>
+        <p:nvSpPr>
+          <p:cNvPr id="4" name="Text 1"/>
+          <p:cNvSpPr/>
+          <p:nvPr/>
+        </p:nvSpPr>
+        <p:spPr>
+          <a:xfrm>
+            <a:off x="5349240" y="1005840"/>
+            <a:ext cx="6522415" cy="731520"/>
+          </a:xfrm>
+          <a:prstGeom prst="rect">
+            <a:avLst/>
+          </a:prstGeom>
+          <a:noFill/>
+          <a:ln/>
+        </p:spPr>
+        <p:txBody>
+          <a:bodyPr wrap="square" lIns="0" tIns="0" rIns="0" bIns="0" rtlCol="0" anchor="ctr">
+            <a:normAutofit/>
+          </a:bodyPr>
+          <a:lstStyle/>
+          <a:p>
+            <a:pPr algn="ctr" indent="0" marL="0">
+              <a:buNone/>
+            </a:pPr>
+            <a:r>
+              <a:rPr lang="en-US" sz="3600" b="1" dirty="0">
+                <a:solidFill>
+                  <a:srgbClr val="990011"/>
+                </a:solidFill>
+                <a:latin typeface="Times New Roman" pitchFamily="34" charset="0"/>
+                <a:ea typeface="Times New Roman" pitchFamily="34" charset="-122"/>
+                <a:cs typeface="Times New Roman" pitchFamily="34" charset="-120"/>
+              </a:rPr>
+              <a:t>Homework</a:t>
+            </a:r>
+            <a:endParaRPr lang="en-US" sz="3600" dirty="0"/>
+          </a:p>
+        </p:txBody>
+      </p:sp>
+      <p:sp>
+        <p:nvSpPr>
+          <p:cNvPr id="5" name="Text 2"/>
+          <p:cNvSpPr/>
+          <p:nvPr/>
+        </p:nvSpPr>
+        <p:spPr>
+          <a:xfrm>
+            <a:off x="5349240" y="1783080"/>
+            <a:ext cx="6522415" cy="4663440"/>
+          </a:xfrm>
+          <a:prstGeom prst="rect">
+            <a:avLst/>
+          </a:prstGeom>
+          <a:noFill/>
+          <a:ln/>
+        </p:spPr>
+        <p:txBody>
+          <a:bodyPr wrap="square" lIns="0" tIns="0" rIns="0" bIns="0" rtlCol="0" anchor="t"/>
+          <a:lstStyle/>
+          <a:p>
+            <a:pPr algn="l" indent="0" marL="0">
+              <a:spcAft>
+                <a:spcPts val="800"/>
+              </a:spcAft>
+              <a:buNone/>
+            </a:pPr>
+            <a:r>
+              <a:rPr lang="en-US" sz="4000" dirty="0">
+                <a:solidFill>
+                  <a:srgbClr val="111111"/>
+                </a:solidFill>
+                <a:latin typeface="Times New Roman" pitchFamily="34" charset="0"/>
+                <a:ea typeface="Times New Roman" pitchFamily="34" charset="-122"/>
+                <a:cs typeface="Times New Roman" pitchFamily="34" charset="-120"/>
+              </a:rPr>
+              <a:t>Ask someone who has lived by the sea (Douala, Kribi or Limbe) or in the mountains (Buea, Mokolo) whether the wind changes between day and night. Write down what they say.</a:t>
+            </a:r>
+            <a:endParaRPr lang="en-US" sz="4000" dirty="0"/>
+          </a:p>
+        </p:txBody>
+      </p:sp>
+      <p:sp>
+        <p:nvSpPr>
+          <p:cNvPr id="25" name="Slide Number Placeholder 0"/>
+          <p:cNvSpPr>
+            <a:spLocks noGrp="1"/>
+          </p:cNvSpPr>
+          <p:nvPr>
+            <p:ph type="sldNum" sz="quarter" idx="4294967295"/>
+          </p:nvPr>
+        </p:nvSpPr>
+        <p:spPr>
+          <a:xfrm>
+            <a:off x="27432" y="91440"/>
+            <a:ext cx="585216" cy="475488"/>
+          </a:xfrm>
+          <a:prstGeom prst="rect">
+            <a:avLst/>
+          </a:prstGeom>
+          <a:extLst>
+            <a:ext uri="{C572A759-6A51-4108-AA02-DFA0A04FC94B}">
+              <ma14:wrappingTextBoxFlag xmlns:ma14="http://schemas.microsoft.com/office/mac/drawingml/2011/main" val="0"/>
+            </a:ext>
+          </a:extLst>
+        </p:spPr>
+        <p:txBody>
+          <a:bodyPr/>
+          <a:lstStyle>
+            <a:lvl1pPr>
+              <a:defRPr sz="2000">
+                <a:solidFill>
+                  <a:srgbClr val="FFFFFF"/>
+                </a:solidFill>
+                <a:latin typeface="Calibri"/>
+                <a:ea typeface="Calibri"/>
+                <a:cs typeface="Calibri"/>
+              </a:defRPr>
+            </a:lvl1pPr>
+          </a:lstStyle>
+          <a:p>
+            <a:pPr algn="ctr"/>
+            <a:fld id="{F7021451-1387-4CA6-816F-3879F97B5CBC}" type="slidenum">
+              <a:rPr b="1" lang="en-US"/>
+              <a:t>43</a:t>
+            </a:fld>
+            <a:endParaRPr lang="en-US"/>
+          </a:p>
+        </p:txBody>
+      </p:sp>
+    </p:spTree>
+  </p:cSld>
+  <p:clrMapOvr>
+    <a:masterClrMapping/>
+  </p:clrMapOvr>
+</p:sld>
+</file>
+
+<file path=ppt/slides/slide44.xml><?xml version="1.0" encoding="utf-8"?>
+<p:sld xmlns:a="http://schemas.openxmlformats.org/drawingml/2006/main" xmlns:r="http://schemas.openxmlformats.org/officeDocument/2006/relationships" xmlns:p="http://schemas.openxmlformats.org/presentationml/2006/main">
+  <p:cSld name="Slide 44">
+    <p:spTree>
+      <p:nvGrpSpPr>
+        <p:cNvPr id="1" name=""/>
+        <p:cNvGrpSpPr/>
+        <p:nvPr/>
+      </p:nvGrpSpPr>
+      <p:grpSpPr>
+        <a:xfrm>
+          <a:off x="0" y="0"/>
+          <a:ext cx="0" cy="0"/>
+          <a:chOff x="0" y="0"/>
+          <a:chExt cx="0" cy="0"/>
+        </a:xfrm>
+      </p:grpSpPr>
+      <p:sp>
+        <p:nvSpPr>
+          <p:cNvPr id="2" name="Text 0"/>
+          <p:cNvSpPr/>
+          <p:nvPr/>
+        </p:nvSpPr>
+        <p:spPr>
+          <a:xfrm>
+            <a:off x="457200" y="713232"/>
+            <a:ext cx="11368735" cy="274320"/>
+          </a:xfrm>
+          <a:prstGeom prst="rect">
+            <a:avLst/>
+          </a:prstGeom>
+          <a:noFill/>
+          <a:ln/>
+        </p:spPr>
+        <p:txBody>
+          <a:bodyPr wrap="square" lIns="0" tIns="0" rIns="0" bIns="0" rtlCol="0" anchor="ctr"/>
+          <a:lstStyle/>
+          <a:p>
+            <a:pPr algn="r" indent="0" marL="0">
+              <a:buNone/>
+            </a:pPr>
+            <a:r>
+              <a:rPr lang="en-US" sz="1400" b="1" dirty="0">
+                <a:solidFill>
+                  <a:srgbClr val="1C3F6E"/>
+                </a:solidFill>
+                <a:latin typeface="Calibri" pitchFamily="34" charset="0"/>
+                <a:ea typeface="Calibri" pitchFamily="34" charset="-122"/>
+                <a:cs typeface="Calibri" pitchFamily="34" charset="-120"/>
+              </a:rPr>
+              <a:t>NEXT LESSON</a:t>
+            </a:r>
+            <a:endParaRPr lang="en-US" sz="1400" dirty="0"/>
+          </a:p>
+        </p:txBody>
+      </p:sp>
+      <p:pic>
+        <p:nvPicPr>
+          <p:cNvPr id="3" name="Image 0" descr="/home/claude/f4/img/minesec_sheet.png">    </p:cNvPr>
+          <p:cNvPicPr>
+            <a:picLocks noChangeAspect="1"/>
+          </p:cNvPicPr>
+          <p:nvPr/>
+        </p:nvPicPr>
+        <p:blipFill>
+          <a:blip r:embed="rId1"/>
+          <a:stretch>
+            <a:fillRect/>
+          </a:stretch>
+        </p:blipFill>
+        <p:spPr>
+          <a:xfrm>
+            <a:off x="0" y="658368"/>
+            <a:ext cx="5120640" cy="5833872"/>
+          </a:xfrm>
+          <a:prstGeom prst="rect">
+            <a:avLst/>
+          </a:prstGeom>
+        </p:spPr>
+      </p:pic>
+      <p:sp>
+        <p:nvSpPr>
+          <p:cNvPr id="4" name="Text 1"/>
+          <p:cNvSpPr/>
+          <p:nvPr/>
+        </p:nvSpPr>
+        <p:spPr>
+          <a:xfrm>
+            <a:off x="5349240" y="1005840"/>
+            <a:ext cx="6522415" cy="731520"/>
+          </a:xfrm>
+          <a:prstGeom prst="rect">
+            <a:avLst/>
+          </a:prstGeom>
+          <a:noFill/>
+          <a:ln/>
+        </p:spPr>
+        <p:txBody>
+          <a:bodyPr wrap="square" lIns="0" tIns="0" rIns="0" bIns="0" rtlCol="0" anchor="ctr">
+            <a:normAutofit/>
+          </a:bodyPr>
+          <a:lstStyle/>
+          <a:p>
+            <a:pPr algn="ctr" indent="0" marL="0">
+              <a:buNone/>
+            </a:pPr>
+            <a:r>
+              <a:rPr lang="en-US" sz="3600" b="1" dirty="0">
+                <a:solidFill>
+                  <a:srgbClr val="990011"/>
+                </a:solidFill>
+                <a:latin typeface="Times New Roman" pitchFamily="34" charset="0"/>
+                <a:ea typeface="Times New Roman" pitchFamily="34" charset="-122"/>
+                <a:cs typeface="Times New Roman" pitchFamily="34" charset="-120"/>
+              </a:rPr>
+              <a:t>Next Lesson</a:t>
+            </a:r>
+            <a:endParaRPr lang="en-US" sz="3600" dirty="0"/>
+          </a:p>
+        </p:txBody>
+      </p:sp>
+      <p:sp>
+        <p:nvSpPr>
+          <p:cNvPr id="5" name="Text 2"/>
+          <p:cNvSpPr/>
+          <p:nvPr/>
+        </p:nvSpPr>
+        <p:spPr>
+          <a:xfrm>
+            <a:off x="5349240" y="1783080"/>
+            <a:ext cx="6522415" cy="4663440"/>
+          </a:xfrm>
+          <a:prstGeom prst="rect">
+            <a:avLst/>
+          </a:prstGeom>
+          <a:noFill/>
+          <a:ln/>
+        </p:spPr>
+        <p:txBody>
+          <a:bodyPr wrap="square" lIns="0" tIns="0" rIns="0" bIns="0" rtlCol="0" anchor="ctr"/>
+          <a:lstStyle/>
+          <a:p>
+            <a:pPr algn="ctr" indent="0" marL="0">
+              <a:spcAft>
+                <a:spcPts val="800"/>
+              </a:spcAft>
+              <a:buNone/>
+            </a:pPr>
+            <a:r>
+              <a:rPr lang="en-US" sz="4000" b="1" dirty="0">
+                <a:solidFill>
+                  <a:srgbClr val="111111"/>
+                </a:solidFill>
+                <a:latin typeface="Times New Roman" pitchFamily="34" charset="0"/>
+                <a:ea typeface="Times New Roman" pitchFamily="34" charset="-122"/>
+                <a:cs typeface="Times New Roman" pitchFamily="34" charset="-120"/>
+              </a:rPr>
+              <a:t>Our next lesson will be on:</a:t>
+            </a:r>
+            <a:endParaRPr lang="en-US" sz="4000" dirty="0"/>
+          </a:p>
+          <a:p>
+            <a:pPr algn="ctr" indent="0" marL="0">
+              <a:spcAft>
+                <a:spcPts val="800"/>
+              </a:spcAft>
+              <a:buNone/>
+            </a:pPr>
+            <a:r>
+              <a:rPr lang="en-US" sz="4000" b="1" dirty="0">
+                <a:solidFill>
+                  <a:srgbClr val="990011"/>
+                </a:solidFill>
+                <a:latin typeface="Times New Roman" pitchFamily="34" charset="0"/>
+                <a:ea typeface="Times New Roman" pitchFamily="34" charset="-122"/>
+                <a:cs typeface="Times New Roman" pitchFamily="34" charset="-120"/>
+              </a:rPr>
+              <a:t>Lesson 37: Local Winds</a:t>
+            </a:r>
+            <a:endParaRPr lang="en-US" sz="4000" dirty="0"/>
+          </a:p>
+        </p:txBody>
+      </p:sp>
+      <p:sp>
+        <p:nvSpPr>
+          <p:cNvPr id="25" name="Slide Number Placeholder 0"/>
+          <p:cNvSpPr>
+            <a:spLocks noGrp="1"/>
+          </p:cNvSpPr>
+          <p:nvPr>
+            <p:ph type="sldNum" sz="quarter" idx="4294967295"/>
+          </p:nvPr>
+        </p:nvSpPr>
+        <p:spPr>
+          <a:xfrm>
+            <a:off x="27432" y="91440"/>
+            <a:ext cx="585216" cy="475488"/>
+          </a:xfrm>
+          <a:prstGeom prst="rect">
+            <a:avLst/>
+          </a:prstGeom>
+          <a:extLst>
+            <a:ext uri="{C572A759-6A51-4108-AA02-DFA0A04FC94B}">
+              <ma14:wrappingTextBoxFlag xmlns:ma14="http://schemas.microsoft.com/office/mac/drawingml/2011/main" val="0"/>
+            </a:ext>
+          </a:extLst>
+        </p:spPr>
+        <p:txBody>
+          <a:bodyPr/>
+          <a:lstStyle>
+            <a:lvl1pPr>
+              <a:defRPr sz="2000">
+                <a:solidFill>
+                  <a:srgbClr val="FFFFFF"/>
+                </a:solidFill>
+                <a:latin typeface="Calibri"/>
+                <a:ea typeface="Calibri"/>
+                <a:cs typeface="Calibri"/>
+              </a:defRPr>
+            </a:lvl1pPr>
+          </a:lstStyle>
+          <a:p>
+            <a:pPr algn="ctr"/>
+            <a:fld id="{F7021451-1387-4CA6-816F-3879F97B5CBC}" type="slidenum">
+              <a:rPr b="1" lang="en-US"/>
+              <a:t>44</a:t>
+            </a:fld>
+            <a:endParaRPr lang="en-US"/>
+          </a:p>
+        </p:txBody>
+      </p:sp>
+    </p:spTree>
+  </p:cSld>
+  <p:clrMapOvr>
+    <a:masterClrMapping/>
+  </p:clrMapOvr>
+</p:sld>
+</file>
+
+<file path=ppt/slides/slide45.xml><?xml version="1.0" encoding="utf-8"?>
+<p:sld xmlns:a="http://schemas.openxmlformats.org/drawingml/2006/main" xmlns:r="http://schemas.openxmlformats.org/officeDocument/2006/relationships" xmlns:p="http://schemas.openxmlformats.org/presentationml/2006/main">
+  <p:cSld name="Slide 45">
+    <p:spTree>
+      <p:nvGrpSpPr>
+        <p:cNvPr id="1" name=""/>
+        <p:cNvGrpSpPr/>
+        <p:nvPr/>
+      </p:nvGrpSpPr>
+      <p:grpSpPr>
+        <a:xfrm>
+          <a:off x="0" y="0"/>
+          <a:ext cx="0" cy="0"/>
+          <a:chOff x="0" y="0"/>
+          <a:chExt cx="0" cy="0"/>
+        </a:xfrm>
+      </p:grpSpPr>
+      <p:sp>
+        <p:nvSpPr>
+          <p:cNvPr id="2" name="Text 0"/>
+          <p:cNvSpPr/>
+          <p:nvPr/>
+        </p:nvSpPr>
+        <p:spPr>
+          <a:xfrm>
+            <a:off x="457200" y="713232"/>
+            <a:ext cx="11368735" cy="274320"/>
+          </a:xfrm>
+          <a:prstGeom prst="rect">
+            <a:avLst/>
+          </a:prstGeom>
+          <a:noFill/>
+          <a:ln/>
+        </p:spPr>
+        <p:txBody>
+          <a:bodyPr wrap="square" lIns="0" tIns="0" rIns="0" bIns="0" rtlCol="0" anchor="ctr"/>
+          <a:lstStyle/>
+          <a:p>
+            <a:pPr algn="r" indent="0" marL="0">
+              <a:buNone/>
+            </a:pPr>
+            <a:r>
+              <a:rPr lang="en-US" sz="1400" b="1" dirty="0">
+                <a:solidFill>
+                  <a:srgbClr val="1C3F6E"/>
+                </a:solidFill>
+                <a:latin typeface="Calibri" pitchFamily="34" charset="0"/>
+                <a:ea typeface="Calibri" pitchFamily="34" charset="-122"/>
+                <a:cs typeface="Calibri" pitchFamily="34" charset="-120"/>
+              </a:rPr>
               <a:t>BILINGUAL GAME</a:t>
             </a:r>
             <a:endParaRPr lang="en-US" sz="1400" dirty="0"/>
@@ -14816,7 +16241,7 @@
       </p:sp>
       <p:graphicFrame>
         <p:nvGraphicFramePr>
-          <p:cNvPr id="42" name="Table 0"/>
+          <p:cNvPr id="46" name="Table 0"/>
           <p:cNvGraphicFramePr>
             <a:graphicFrameLocks noGrp="1"/>
           </p:cNvGraphicFramePr>
@@ -16128,7 +17553,7 @@
             <a:pPr algn="ctr"/>
             <a:fld id="{F7021451-1387-4CA6-816F-3879F97B5CBC}" type="slidenum">
               <a:rPr b="1" lang="en-US"/>
-              <a:t>41</a:t>
+              <a:t>45</a:t>
             </a:fld>
             <a:endParaRPr lang="en-US"/>
           </a:p>
@@ -16142,9 +17567,9 @@
 </p:sld>
 </file>
 
-<file path=ppt/slides/slide42.xml><?xml version="1.0" encoding="utf-8"?>
+<file path=ppt/slides/slide46.xml><?xml version="1.0" encoding="utf-8"?>
 <p:sld xmlns:a="http://schemas.openxmlformats.org/drawingml/2006/main" xmlns:r="http://schemas.openxmlformats.org/officeDocument/2006/relationships" xmlns:p="http://schemas.openxmlformats.org/presentationml/2006/main">
-  <p:cSld name="Slide 42">
+  <p:cSld name="Slide 46">
     <p:spTree>
       <p:nvGrpSpPr>
         <p:cNvPr id="1" name=""/>
@@ -16239,7 +17664,7 @@
       </p:sp>
       <p:graphicFrame>
         <p:nvGraphicFramePr>
-          <p:cNvPr id="43" name="Table 0"/>
+          <p:cNvPr id="47" name="Table 0"/>
           <p:cNvGraphicFramePr>
             <a:graphicFrameLocks noGrp="1"/>
           </p:cNvGraphicFramePr>
@@ -16861,7 +18286,7 @@
             <a:pPr algn="ctr"/>
             <a:fld id="{F7021451-1387-4CA6-816F-3879F97B5CBC}" type="slidenum">
               <a:rPr b="1" lang="en-US"/>
-              <a:t>42</a:t>
+              <a:t>46</a:t>
             </a:fld>
             <a:endParaRPr lang="en-US"/>
           </a:p>
@@ -16875,9 +18300,9 @@
 </p:sld>
 </file>
 
-<file path=ppt/slides/slide43.xml><?xml version="1.0" encoding="utf-8"?>
+<file path=ppt/slides/slide47.xml><?xml version="1.0" encoding="utf-8"?>
 <p:sld xmlns:a="http://schemas.openxmlformats.org/drawingml/2006/main" xmlns:r="http://schemas.openxmlformats.org/officeDocument/2006/relationships" xmlns:p="http://schemas.openxmlformats.org/presentationml/2006/main">
-  <p:cSld name="Slide 43">
+  <p:cSld name="Slide 47">
     <p:spTree>
       <p:nvGrpSpPr>
         <p:cNvPr id="1" name=""/>
@@ -16972,7 +18397,7 @@
       </p:sp>
       <p:graphicFrame>
         <p:nvGraphicFramePr>
-          <p:cNvPr id="44" name="Table 0"/>
+          <p:cNvPr id="48" name="Table 0"/>
           <p:cNvGraphicFramePr>
             <a:graphicFrameLocks noGrp="1"/>
           </p:cNvGraphicFramePr>
@@ -17082,7 +18507,7 @@
                           <a:ea typeface="Calibri" pitchFamily="34" charset="-122"/>
                           <a:cs typeface="Calibri" pitchFamily="34" charset="-120"/>
                         </a:rPr>
-                        <a:t>Pressure Belts; Planetary Winds.</a:t>
+                        <a:t>DEFINITIONS; Meaning of Pressure Belts: Major Types; Illustration of Pressure Belts and Planetary Winds.</a:t>
                       </a:r>
                       <a:endParaRPr lang="en-US" sz="1600" dirty="0">
                         <a:latin typeface="Calibri" charset="0"/>
@@ -17732,7 +19157,7 @@
             <a:pPr algn="ctr"/>
             <a:fld id="{F7021451-1387-4CA6-816F-3879F97B5CBC}" type="slidenum">
               <a:rPr b="1" lang="en-US"/>
-              <a:t>43</a:t>
+              <a:t>47</a:t>
             </a:fld>
             <a:endParaRPr lang="en-US"/>
           </a:p>
@@ -17746,9 +19171,9 @@
 </p:sld>
 </file>
 
-<file path=ppt/slides/slide44.xml><?xml version="1.0" encoding="utf-8"?>
+<file path=ppt/slides/slide48.xml><?xml version="1.0" encoding="utf-8"?>
 <p:sld xmlns:a="http://schemas.openxmlformats.org/drawingml/2006/main" xmlns:r="http://schemas.openxmlformats.org/officeDocument/2006/relationships" xmlns:p="http://schemas.openxmlformats.org/presentationml/2006/main">
-  <p:cSld name="Slide 44">
+  <p:cSld name="Slide 48">
     <p:spTree>
       <p:nvGrpSpPr>
         <p:cNvPr id="1" name=""/>
@@ -17946,7 +19371,7 @@
                 <a:ea typeface="Calibri" pitchFamily="34" charset="-122"/>
                 <a:cs typeface="Calibri" pitchFamily="34" charset="-120"/>
               </a:rPr>
-              <a:t>Without the projector (Activity 1): draw the belts on a circle.</a:t>
+              <a:t>Without the projector (Activity 1): draw a globe with bands.</a:t>
             </a:r>
             <a:endParaRPr lang="en-US" sz="2000" dirty="0"/>
           </a:p>
@@ -17967,7 +19392,7 @@
                 <a:ea typeface="Calibri" pitchFamily="34" charset="-122"/>
                 <a:cs typeface="Calibri" pitchFamily="34" charset="-120"/>
               </a:rPr>
-              <a:t>Without the projector (Activity 2): use the example of December in Garoua.</a:t>
+              <a:t>Without the projector (Activity 2): describe a Harmattan morning.</a:t>
             </a:r>
             <a:endParaRPr lang="en-US" sz="2000" dirty="0"/>
           </a:p>
@@ -17988,7 +19413,7 @@
                 <a:ea typeface="Calibri" pitchFamily="34" charset="-122"/>
                 <a:cs typeface="Calibri" pitchFamily="34" charset="-120"/>
               </a:rPr>
-              <a:t>Without the projector (Activity 3): move a paper strip up and down a map of Africa.</a:t>
+              <a:t>Without the projector (Activity 3): draw the rain belt in July and in January.</a:t>
             </a:r>
             <a:endParaRPr lang="en-US" sz="2000" dirty="0"/>
           </a:p>
@@ -18036,7 +19461,7 @@
             <a:pPr algn="ctr"/>
             <a:fld id="{F7021451-1387-4CA6-816F-3879F97B5CBC}" type="slidenum">
               <a:rPr b="1" lang="en-US"/>
-              <a:t>44</a:t>
+              <a:t>48</a:t>
             </a:fld>
             <a:endParaRPr lang="en-US"/>
           </a:p>
@@ -18050,9 +19475,9 @@
 </p:sld>
 </file>
 
-<file path=ppt/slides/slide45.xml><?xml version="1.0" encoding="utf-8"?>
+<file path=ppt/slides/slide49.xml><?xml version="1.0" encoding="utf-8"?>
 <p:sld xmlns:a="http://schemas.openxmlformats.org/drawingml/2006/main" xmlns:r="http://schemas.openxmlformats.org/officeDocument/2006/relationships" xmlns:p="http://schemas.openxmlformats.org/presentationml/2006/main">
-  <p:cSld name="Slide 45">
+  <p:cSld name="Slide 49">
     <p:spTree>
       <p:nvGrpSpPr>
         <p:cNvPr id="1" name=""/>
@@ -18319,7 +19744,7 @@
             <a:pPr algn="ctr"/>
             <a:fld id="{F7021451-1387-4CA6-816F-3879F97B5CBC}" type="slidenum">
               <a:rPr b="1" lang="en-US"/>
-              <a:t>45</a:t>
+              <a:t>49</a:t>
             </a:fld>
             <a:endParaRPr lang="en-US"/>
           </a:p>

--- a/lecons/F3/40_FORM4_LESSON36_Pressure_Belts_Planetary_Winds.pptx
+++ b/lecons/F3/40_FORM4_LESSON36_Pressure_Belts_Planetary_Winds.pptx
@@ -3454,7 +3454,7 @@
           <a:p>
             <a:r>
               <a:rPr lang="en-US" dirty="0"/>
-              <a:t>Before we start the new lesson, let us correct the homework I gave you at the end of Lesson 35: Precipitation. The question was: Observe the wind in Garoua for three days: from which direction does it blow? Is it dry or moist? Write your observations. Take out your exercise books.</a:t>
+              <a:t>Before we start the new lesson, let us correct the homework I gave you at the end of Lesson 35: Precipitation. The question was: Name the pressure belt found at the Equator. Take out your exercise books.</a:t>
             </a:r>
             <a:endParaRPr lang="en-US" dirty="0"/>
           </a:p>
@@ -3806,7 +3806,7 @@
           <a:p>
             <a:r>
               <a:rPr lang="en-US" dirty="0"/>
-              <a:t>For your homework: Ask someone who has lived by the sea (Douala, Kribi or Limbe) or in the mountains (Buea, Mokolo) whether the wind changes between day and night. Write down what they say. We shall correct it at the beginning of our next lesson.</a:t>
+              <a:t>For your homework: Name the wind that blows from the sea to the land by day. We shall correct it at the beginning of our next lesson.</a:t>
             </a:r>
             <a:endParaRPr lang="en-US" dirty="0"/>
           </a:p>
@@ -4422,7 +4422,7 @@
           <a:p>
             <a:r>
               <a:rPr lang="en-US" dirty="0"/>
-              <a:t>Here is a good answer. Answers vary. In the dry season the wind blows from the north-east (Harmattan): it is dry and dusty. In the rainy season it blows from the south-west: it is moist. Compare it with your own answer and correct your work in red.</a:t>
+              <a:t>Here is a good answer. The Equatorial Low. Compare it with your own answer and correct your work in red.</a:t>
             </a:r>
             <a:endParaRPr lang="en-US" dirty="0"/>
           </a:p>
@@ -14901,7 +14901,7 @@
                 <a:ea typeface="Times New Roman" pitchFamily="34" charset="-122"/>
                 <a:cs typeface="Times New Roman" pitchFamily="34" charset="-120"/>
               </a:rPr>
-              <a:t>Observe the wind in Garoua for three days: from which direction does it blow? Is it dry or moist? Write your observations.</a:t>
+              <a:t>Name the pressure belt found at the Equator.</a:t>
             </a:r>
             <a:endParaRPr lang="en-US" sz="4000" dirty="0"/>
           </a:p>
@@ -15843,7 +15843,7 @@
                 <a:ea typeface="Times New Roman" pitchFamily="34" charset="-122"/>
                 <a:cs typeface="Times New Roman" pitchFamily="34" charset="-120"/>
               </a:rPr>
-              <a:t>Ask someone who has lived by the sea (Douala, Kribi or Limbe) or in the mountains (Buea, Mokolo) whether the wind changes between day and night. Write down what they say.</a:t>
+              <a:t>Name the wind that blows from the sea to the land by day.</a:t>
             </a:r>
             <a:endParaRPr lang="en-US" sz="4000" dirty="0"/>
           </a:p>
@@ -18783,7 +18783,7 @@
                           <a:ea typeface="Calibri" pitchFamily="34" charset="-122"/>
                           <a:cs typeface="Calibri" pitchFamily="34" charset="-120"/>
                         </a:rPr>
-                        <a:t>Ask someone who has lived by the sea (Douala, Kribi or Limbe) or in the mountains (Buea, Mokolo) whether the wind changes between day and night. Write down what they say.</a:t>
+                        <a:t>Name the wind that blows from the sea to the land by day.</a:t>
                       </a:r>
                       <a:endParaRPr lang="en-US" sz="1600" dirty="0">
                         <a:latin typeface="Calibri" charset="0"/>
@@ -19915,7 +19915,7 @@
                 <a:ea typeface="Times New Roman" pitchFamily="34" charset="-122"/>
                 <a:cs typeface="Times New Roman" pitchFamily="34" charset="-120"/>
               </a:rPr>
-              <a:t>Answers vary. In the dry season the wind blows from the north-east (Harmattan): it is dry and dusty. In the rainy season it blows from the south-west: it is moist.</a:t>
+              <a:t>The Equatorial Low.</a:t>
             </a:r>
             <a:endParaRPr lang="en-US" sz="4000" dirty="0"/>
           </a:p>
